--- a/figures/Figure3_case2.pptx
+++ b/figures/Figure3_case2.pptx
@@ -253,7 +253,7 @@
       <p15:sldGuideLst xmlns:p15="http://schemas.microsoft.com/office/powerpoint/2012/main"/>
     </p:ext>
     <p:ext uri="GoogleSlidesCustomDataVersion2">
-      <go:slidesCustomData xmlns="" xmlns:mc="http://schemas.openxmlformats.org/markup-compatibility/2006" xmlns:mv="urn:schemas-microsoft-com:mac:vml" xmlns:c="http://schemas.openxmlformats.org/drawingml/2006/chart" xmlns:dgm="http://schemas.openxmlformats.org/drawingml/2006/diagram" xmlns:o="urn:schemas-microsoft-com:office:office" xmlns:v="urn:schemas-microsoft-com:vml" xmlns:pvml="urn:schemas-microsoft-com:office:powerpoint" xmlns:com="http://schemas.openxmlformats.org/drawingml/2006/compatibility" xmlns:p14="http://schemas.microsoft.com/office/powerpoint/2010/main" xmlns:p15="http://schemas.microsoft.com/office/powerpoint/2012/main" xmlns:ahyp="http://schemas.microsoft.com/office/drawing/2018/hyperlinkcolor" xmlns:go="http://customooxmlschemas.google.com/" r:id="rId8" roundtripDataSignature="AMtx7mhfnrVQrRcpZDcEMkrk0w6Yo+xwwQ=="/>
+      <go:slidesCustomData xmlns:go="http://customooxmlschemas.google.com/" xmlns:ahyp="http://schemas.microsoft.com/office/drawing/2018/hyperlinkcolor" xmlns:p15="http://schemas.microsoft.com/office/powerpoint/2012/main" xmlns:p14="http://schemas.microsoft.com/office/powerpoint/2010/main" xmlns:com="http://schemas.openxmlformats.org/drawingml/2006/compatibility" xmlns:pvml="urn:schemas-microsoft-com:office:powerpoint" xmlns:v="urn:schemas-microsoft-com:vml" xmlns:o="urn:schemas-microsoft-com:office:office" xmlns:dgm="http://schemas.openxmlformats.org/drawingml/2006/diagram" xmlns:c="http://schemas.openxmlformats.org/drawingml/2006/chart" xmlns:mv="urn:schemas-microsoft-com:mac:vml" xmlns:mc="http://schemas.openxmlformats.org/markup-compatibility/2006" xmlns="" r:id="rId8" roundtripDataSignature="AMtx7mhfnrVQrRcpZDcEMkrk0w6Yo+xwwQ=="/>
     </p:ext>
   </p:extLst>
 </p:presentation>
@@ -13404,7 +13404,7 @@
         </p:blipFill>
         <p:spPr>
           <a:xfrm>
-            <a:off x="7013295" y="3616391"/>
+            <a:off x="7329174" y="3644979"/>
             <a:ext cx="7843210" cy="3526282"/>
           </a:xfrm>
           <a:prstGeom prst="rect">
@@ -13592,36 +13592,6 @@
           <a:xfrm>
             <a:off x="7293777" y="7298689"/>
             <a:ext cx="11134018" cy="2618302"/>
-          </a:xfrm>
-          <a:prstGeom prst="rect">
-            <a:avLst/>
-          </a:prstGeom>
-        </p:spPr>
-      </p:pic>
-      <p:pic>
-        <p:nvPicPr>
-          <p:cNvPr id="2" name="Picture 1">
-            <a:extLst>
-              <a:ext uri="{FF2B5EF4-FFF2-40B4-BE49-F238E27FC236}">
-                <a16:creationId xmlns:a16="http://schemas.microsoft.com/office/drawing/2014/main" id="{90EBCB16-AB46-685F-1538-FF6550C4CB1E}"/>
-              </a:ext>
-            </a:extLst>
-          </p:cNvPr>
-          <p:cNvPicPr>
-            <a:picLocks noChangeAspect="1"/>
-          </p:cNvPicPr>
-          <p:nvPr/>
-        </p:nvPicPr>
-        <p:blipFill>
-          <a:blip r:embed="rId12"/>
-          <a:stretch>
-            <a:fillRect/>
-          </a:stretch>
-        </p:blipFill>
-        <p:spPr>
-          <a:xfrm>
-            <a:off x="7165695" y="3768791"/>
-            <a:ext cx="7843210" cy="3526282"/>
           </a:xfrm>
           <a:prstGeom prst="rect">
             <a:avLst/>

--- a/figures/Figure3_case2.pptx
+++ b/figures/Figure3_case2.pptx
@@ -253,7 +253,7 @@
       <p15:sldGuideLst xmlns:p15="http://schemas.microsoft.com/office/powerpoint/2012/main"/>
     </p:ext>
     <p:ext uri="GoogleSlidesCustomDataVersion2">
-      <go:slidesCustomData xmlns:go="http://customooxmlschemas.google.com/" xmlns:ahyp="http://schemas.microsoft.com/office/drawing/2018/hyperlinkcolor" xmlns:p15="http://schemas.microsoft.com/office/powerpoint/2012/main" xmlns:p14="http://schemas.microsoft.com/office/powerpoint/2010/main" xmlns:com="http://schemas.openxmlformats.org/drawingml/2006/compatibility" xmlns:pvml="urn:schemas-microsoft-com:office:powerpoint" xmlns:v="urn:schemas-microsoft-com:vml" xmlns:o="urn:schemas-microsoft-com:office:office" xmlns:dgm="http://schemas.openxmlformats.org/drawingml/2006/diagram" xmlns:c="http://schemas.openxmlformats.org/drawingml/2006/chart" xmlns:mv="urn:schemas-microsoft-com:mac:vml" xmlns:mc="http://schemas.openxmlformats.org/markup-compatibility/2006" xmlns="" r:id="rId8" roundtripDataSignature="AMtx7mhfnrVQrRcpZDcEMkrk0w6Yo+xwwQ=="/>
+      <go:slidesCustomData xmlns="" xmlns:mc="http://schemas.openxmlformats.org/markup-compatibility/2006" xmlns:mv="urn:schemas-microsoft-com:mac:vml" xmlns:c="http://schemas.openxmlformats.org/drawingml/2006/chart" xmlns:dgm="http://schemas.openxmlformats.org/drawingml/2006/diagram" xmlns:o="urn:schemas-microsoft-com:office:office" xmlns:v="urn:schemas-microsoft-com:vml" xmlns:pvml="urn:schemas-microsoft-com:office:powerpoint" xmlns:com="http://schemas.openxmlformats.org/drawingml/2006/compatibility" xmlns:p14="http://schemas.microsoft.com/office/powerpoint/2010/main" xmlns:p15="http://schemas.microsoft.com/office/powerpoint/2012/main" xmlns:ahyp="http://schemas.microsoft.com/office/drawing/2018/hyperlinkcolor" xmlns:go="http://customooxmlschemas.google.com/" r:id="rId8" roundtripDataSignature="AMtx7mhfnrVQrRcpZDcEMkrk0w6Yo+xwwQ=="/>
     </p:ext>
   </p:extLst>
 </p:presentation>
@@ -11764,6 +11764,66 @@
       </p:grpSpPr>
       <p:pic>
         <p:nvPicPr>
+          <p:cNvPr id="5" name="Picture 4">
+            <a:extLst>
+              <a:ext uri="{FF2B5EF4-FFF2-40B4-BE49-F238E27FC236}">
+                <a16:creationId xmlns:a16="http://schemas.microsoft.com/office/drawing/2014/main" id="{0E0D12F0-C2B3-5AD1-59E4-4E993DF78CF9}"/>
+              </a:ext>
+            </a:extLst>
+          </p:cNvPr>
+          <p:cNvPicPr>
+            <a:picLocks noChangeAspect="1"/>
+          </p:cNvPicPr>
+          <p:nvPr/>
+        </p:nvPicPr>
+        <p:blipFill>
+          <a:blip r:embed="rId3"/>
+          <a:stretch>
+            <a:fillRect/>
+          </a:stretch>
+        </p:blipFill>
+        <p:spPr>
+          <a:xfrm>
+            <a:off x="16012481" y="3537464"/>
+            <a:ext cx="5951769" cy="3686937"/>
+          </a:xfrm>
+          <a:prstGeom prst="rect">
+            <a:avLst/>
+          </a:prstGeom>
+        </p:spPr>
+      </p:pic>
+      <p:pic>
+        <p:nvPicPr>
+          <p:cNvPr id="3" name="Picture 2">
+            <a:extLst>
+              <a:ext uri="{FF2B5EF4-FFF2-40B4-BE49-F238E27FC236}">
+                <a16:creationId xmlns:a16="http://schemas.microsoft.com/office/drawing/2014/main" id="{9A98CE56-A6B8-2F6E-30E0-A0C9B6855D1D}"/>
+              </a:ext>
+            </a:extLst>
+          </p:cNvPr>
+          <p:cNvPicPr>
+            <a:picLocks noChangeAspect="1"/>
+          </p:cNvPicPr>
+          <p:nvPr/>
+        </p:nvPicPr>
+        <p:blipFill>
+          <a:blip r:embed="rId4"/>
+          <a:stretch>
+            <a:fillRect/>
+          </a:stretch>
+        </p:blipFill>
+        <p:spPr>
+          <a:xfrm>
+            <a:off x="18501494" y="163634"/>
+            <a:ext cx="4330700" cy="3124200"/>
+          </a:xfrm>
+          <a:prstGeom prst="rect">
+            <a:avLst/>
+          </a:prstGeom>
+        </p:spPr>
+      </p:pic>
+      <p:pic>
+        <p:nvPicPr>
           <p:cNvPr id="121" name="Picture 120">
             <a:extLst>
               <a:ext uri="{FF2B5EF4-FFF2-40B4-BE49-F238E27FC236}">
@@ -11777,7 +11837,7 @@
           <p:nvPr/>
         </p:nvPicPr>
         <p:blipFill>
-          <a:blip r:embed="rId3"/>
+          <a:blip r:embed="rId5"/>
           <a:stretch>
             <a:fillRect/>
           </a:stretch>
@@ -11807,7 +11867,7 @@
           <p:nvPr/>
         </p:nvPicPr>
         <p:blipFill>
-          <a:blip r:embed="rId4"/>
+          <a:blip r:embed="rId6"/>
           <a:stretch>
             <a:fillRect/>
           </a:stretch>
@@ -11816,66 +11876,6 @@
           <a:xfrm>
             <a:off x="108175" y="163634"/>
             <a:ext cx="6380902" cy="9405183"/>
-          </a:xfrm>
-          <a:prstGeom prst="rect">
-            <a:avLst/>
-          </a:prstGeom>
-        </p:spPr>
-      </p:pic>
-      <p:pic>
-        <p:nvPicPr>
-          <p:cNvPr id="83" name="Picture 82">
-            <a:extLst>
-              <a:ext uri="{FF2B5EF4-FFF2-40B4-BE49-F238E27FC236}">
-                <a16:creationId xmlns:a16="http://schemas.microsoft.com/office/drawing/2014/main" id="{09FF32C2-7D53-15BF-3F3B-6BA7E4FB9EAD}"/>
-              </a:ext>
-            </a:extLst>
-          </p:cNvPr>
-          <p:cNvPicPr>
-            <a:picLocks noChangeAspect="1"/>
-          </p:cNvPicPr>
-          <p:nvPr/>
-        </p:nvPicPr>
-        <p:blipFill>
-          <a:blip r:embed="rId5"/>
-          <a:stretch>
-            <a:fillRect/>
-          </a:stretch>
-        </p:blipFill>
-        <p:spPr>
-          <a:xfrm>
-            <a:off x="15926216" y="3644979"/>
-            <a:ext cx="5944347" cy="3682339"/>
-          </a:xfrm>
-          <a:prstGeom prst="rect">
-            <a:avLst/>
-          </a:prstGeom>
-        </p:spPr>
-      </p:pic>
-      <p:pic>
-        <p:nvPicPr>
-          <p:cNvPr id="85" name="Picture 84">
-            <a:extLst>
-              <a:ext uri="{FF2B5EF4-FFF2-40B4-BE49-F238E27FC236}">
-                <a16:creationId xmlns:a16="http://schemas.microsoft.com/office/drawing/2014/main" id="{A3DA2CF3-CE82-8BF3-B5D7-8ACB41A570E7}"/>
-              </a:ext>
-            </a:extLst>
-          </p:cNvPr>
-          <p:cNvPicPr>
-            <a:picLocks noChangeAspect="1"/>
-          </p:cNvPicPr>
-          <p:nvPr/>
-        </p:nvPicPr>
-        <p:blipFill>
-          <a:blip r:embed="rId6"/>
-          <a:stretch>
-            <a:fillRect/>
-          </a:stretch>
-        </p:blipFill>
-        <p:spPr>
-          <a:xfrm>
-            <a:off x="18482477" y="163634"/>
-            <a:ext cx="4469177" cy="3224098"/>
           </a:xfrm>
           <a:prstGeom prst="rect">
             <a:avLst/>
@@ -13382,36 +13382,6 @@
           </a:p>
         </p:txBody>
       </p:sp>
-      <p:pic>
-        <p:nvPicPr>
-          <p:cNvPr id="109" name="Picture 108">
-            <a:extLst>
-              <a:ext uri="{FF2B5EF4-FFF2-40B4-BE49-F238E27FC236}">
-                <a16:creationId xmlns:a16="http://schemas.microsoft.com/office/drawing/2014/main" id="{45865CFB-3C87-230F-72AD-96D148114BEC}"/>
-              </a:ext>
-            </a:extLst>
-          </p:cNvPr>
-          <p:cNvPicPr>
-            <a:picLocks noChangeAspect="1"/>
-          </p:cNvPicPr>
-          <p:nvPr/>
-        </p:nvPicPr>
-        <p:blipFill>
-          <a:blip r:embed="rId12"/>
-          <a:stretch>
-            <a:fillRect/>
-          </a:stretch>
-        </p:blipFill>
-        <p:spPr>
-          <a:xfrm>
-            <a:off x="7329174" y="3644979"/>
-            <a:ext cx="7843210" cy="3526282"/>
-          </a:xfrm>
-          <a:prstGeom prst="rect">
-            <a:avLst/>
-          </a:prstGeom>
-        </p:spPr>
-      </p:pic>
       <p:sp>
         <p:nvSpPr>
           <p:cNvPr id="110" name="Google Shape;95;p1">
@@ -13583,7 +13553,7 @@
           <p:nvPr/>
         </p:nvPicPr>
         <p:blipFill>
-          <a:blip r:embed="rId13"/>
+          <a:blip r:embed="rId12"/>
           <a:stretch>
             <a:fillRect/>
           </a:stretch>
@@ -13592,6 +13562,36 @@
           <a:xfrm>
             <a:off x="7293777" y="7298689"/>
             <a:ext cx="11134018" cy="2618302"/>
+          </a:xfrm>
+          <a:prstGeom prst="rect">
+            <a:avLst/>
+          </a:prstGeom>
+        </p:spPr>
+      </p:pic>
+      <p:pic>
+        <p:nvPicPr>
+          <p:cNvPr id="7" name="Picture 6">
+            <a:extLst>
+              <a:ext uri="{FF2B5EF4-FFF2-40B4-BE49-F238E27FC236}">
+                <a16:creationId xmlns:a16="http://schemas.microsoft.com/office/drawing/2014/main" id="{614F4FE2-CCCA-8282-18AF-A50038DE9A5B}"/>
+              </a:ext>
+            </a:extLst>
+          </p:cNvPr>
+          <p:cNvPicPr>
+            <a:picLocks noChangeAspect="1"/>
+          </p:cNvPicPr>
+          <p:nvPr/>
+        </p:nvPicPr>
+        <p:blipFill>
+          <a:blip r:embed="rId13"/>
+          <a:stretch>
+            <a:fillRect/>
+          </a:stretch>
+        </p:blipFill>
+        <p:spPr>
+          <a:xfrm>
+            <a:off x="7269275" y="3537464"/>
+            <a:ext cx="7728834" cy="3474859"/>
           </a:xfrm>
           <a:prstGeom prst="rect">
             <a:avLst/>

--- a/figures/Figure3_case2.pptx
+++ b/figures/Figure3_case2.pptx
@@ -10,7 +10,7 @@
   <p:sldIdLst>
     <p:sldId id="256" r:id="rId2"/>
   </p:sldIdLst>
-  <p:sldSz cx="23039388" cy="10080625"/>
+  <p:sldSz cx="6858000" cy="9144000" type="letter"/>
   <p:notesSz cx="6858000" cy="9144000"/>
   <p:embeddedFontLst>
     <p:embeddedFont>
@@ -45,7 +45,7 @@
         <a:srgbClr val="000000"/>
       </a:buClr>
       <a:buFont typeface="Arial"/>
-      <a:defRPr sz="1575" b="0" i="0" u="none" strike="noStrike" cap="none">
+      <a:defRPr sz="761" b="0" i="0" u="none" strike="noStrike" cap="none">
         <a:solidFill>
           <a:srgbClr val="000000"/>
         </a:solidFill>
@@ -69,7 +69,7 @@
         <a:srgbClr val="000000"/>
       </a:buClr>
       <a:buFont typeface="Arial"/>
-      <a:defRPr sz="1575" b="0" i="0" u="none" strike="noStrike" cap="none">
+      <a:defRPr sz="761" b="0" i="0" u="none" strike="noStrike" cap="none">
         <a:solidFill>
           <a:srgbClr val="000000"/>
         </a:solidFill>
@@ -93,7 +93,7 @@
         <a:srgbClr val="000000"/>
       </a:buClr>
       <a:buFont typeface="Arial"/>
-      <a:defRPr sz="1575" b="0" i="0" u="none" strike="noStrike" cap="none">
+      <a:defRPr sz="761" b="0" i="0" u="none" strike="noStrike" cap="none">
         <a:solidFill>
           <a:srgbClr val="000000"/>
         </a:solidFill>
@@ -117,7 +117,7 @@
         <a:srgbClr val="000000"/>
       </a:buClr>
       <a:buFont typeface="Arial"/>
-      <a:defRPr sz="1575" b="0" i="0" u="none" strike="noStrike" cap="none">
+      <a:defRPr sz="761" b="0" i="0" u="none" strike="noStrike" cap="none">
         <a:solidFill>
           <a:srgbClr val="000000"/>
         </a:solidFill>
@@ -141,7 +141,7 @@
         <a:srgbClr val="000000"/>
       </a:buClr>
       <a:buFont typeface="Arial"/>
-      <a:defRPr sz="1575" b="0" i="0" u="none" strike="noStrike" cap="none">
+      <a:defRPr sz="761" b="0" i="0" u="none" strike="noStrike" cap="none">
         <a:solidFill>
           <a:srgbClr val="000000"/>
         </a:solidFill>
@@ -165,7 +165,7 @@
         <a:srgbClr val="000000"/>
       </a:buClr>
       <a:buFont typeface="Arial"/>
-      <a:defRPr sz="1575" b="0" i="0" u="none" strike="noStrike" cap="none">
+      <a:defRPr sz="761" b="0" i="0" u="none" strike="noStrike" cap="none">
         <a:solidFill>
           <a:srgbClr val="000000"/>
         </a:solidFill>
@@ -189,7 +189,7 @@
         <a:srgbClr val="000000"/>
       </a:buClr>
       <a:buFont typeface="Arial"/>
-      <a:defRPr sz="1575" b="0" i="0" u="none" strike="noStrike" cap="none">
+      <a:defRPr sz="761" b="0" i="0" u="none" strike="noStrike" cap="none">
         <a:solidFill>
           <a:srgbClr val="000000"/>
         </a:solidFill>
@@ -213,7 +213,7 @@
         <a:srgbClr val="000000"/>
       </a:buClr>
       <a:buFont typeface="Arial"/>
-      <a:defRPr sz="1575" b="0" i="0" u="none" strike="noStrike" cap="none">
+      <a:defRPr sz="761" b="0" i="0" u="none" strike="noStrike" cap="none">
         <a:solidFill>
           <a:srgbClr val="000000"/>
         </a:solidFill>
@@ -237,7 +237,7 @@
         <a:srgbClr val="000000"/>
       </a:buClr>
       <a:buFont typeface="Arial"/>
-      <a:defRPr sz="1575" b="0" i="0" u="none" strike="noStrike" cap="none">
+      <a:defRPr sz="761" b="0" i="0" u="none" strike="noStrike" cap="none">
         <a:solidFill>
           <a:srgbClr val="000000"/>
         </a:solidFill>
@@ -253,7 +253,7 @@
       <p15:sldGuideLst xmlns:p15="http://schemas.microsoft.com/office/powerpoint/2012/main"/>
     </p:ext>
     <p:ext uri="GoogleSlidesCustomDataVersion2">
-      <go:slidesCustomData xmlns="" xmlns:mc="http://schemas.openxmlformats.org/markup-compatibility/2006" xmlns:mv="urn:schemas-microsoft-com:mac:vml" xmlns:c="http://schemas.openxmlformats.org/drawingml/2006/chart" xmlns:dgm="http://schemas.openxmlformats.org/drawingml/2006/diagram" xmlns:o="urn:schemas-microsoft-com:office:office" xmlns:v="urn:schemas-microsoft-com:vml" xmlns:pvml="urn:schemas-microsoft-com:office:powerpoint" xmlns:com="http://schemas.openxmlformats.org/drawingml/2006/compatibility" xmlns:p14="http://schemas.microsoft.com/office/powerpoint/2010/main" xmlns:p15="http://schemas.microsoft.com/office/powerpoint/2012/main" xmlns:ahyp="http://schemas.microsoft.com/office/drawing/2018/hyperlinkcolor" xmlns:go="http://customooxmlschemas.google.com/" r:id="rId8" roundtripDataSignature="AMtx7mhfnrVQrRcpZDcEMkrk0w6Yo+xwwQ=="/>
+      <go:slidesCustomData xmlns:go="http://customooxmlschemas.google.com/" xmlns:ahyp="http://schemas.microsoft.com/office/drawing/2018/hyperlinkcolor" xmlns:p15="http://schemas.microsoft.com/office/powerpoint/2012/main" xmlns:p14="http://schemas.microsoft.com/office/powerpoint/2010/main" xmlns:com="http://schemas.openxmlformats.org/drawingml/2006/compatibility" xmlns:pvml="urn:schemas-microsoft-com:office:powerpoint" xmlns:v="urn:schemas-microsoft-com:vml" xmlns:o="urn:schemas-microsoft-com:office:office" xmlns:dgm="http://schemas.openxmlformats.org/drawingml/2006/diagram" xmlns:c="http://schemas.openxmlformats.org/drawingml/2006/chart" xmlns:mv="urn:schemas-microsoft-com:mac:vml" xmlns:mc="http://schemas.openxmlformats.org/markup-compatibility/2006" xmlns="" r:id="rId8" roundtripDataSignature="AMtx7mhfnrVQrRcpZDcEMkrk0w6Yo+xwwQ=="/>
     </p:ext>
   </p:extLst>
 </p:presentation>
@@ -706,8 +706,8 @@
         </p:nvSpPr>
         <p:spPr>
           <a:xfrm>
-            <a:off x="-96838" y="1143000"/>
-            <a:ext cx="7051676" cy="3086100"/>
+            <a:off x="2271713" y="1143000"/>
+            <a:ext cx="2314575" cy="3086100"/>
           </a:xfrm>
           <a:custGeom>
             <a:avLst/>
@@ -1246,7 +1246,7 @@
         <a:srgbClr val="000000"/>
       </a:buClr>
       <a:buFont typeface="Arial"/>
-      <a:defRPr sz="1575" b="0" i="0" u="none" strike="noStrike" cap="none">
+      <a:defRPr sz="761" b="0" i="0" u="none" strike="noStrike" cap="none">
         <a:solidFill>
           <a:srgbClr val="000000"/>
         </a:solidFill>
@@ -1270,7 +1270,7 @@
         <a:srgbClr val="000000"/>
       </a:buClr>
       <a:buFont typeface="Arial"/>
-      <a:defRPr sz="1575" b="0" i="0" u="none" strike="noStrike" cap="none">
+      <a:defRPr sz="761" b="0" i="0" u="none" strike="noStrike" cap="none">
         <a:solidFill>
           <a:srgbClr val="000000"/>
         </a:solidFill>
@@ -1294,7 +1294,7 @@
         <a:srgbClr val="000000"/>
       </a:buClr>
       <a:buFont typeface="Arial"/>
-      <a:defRPr sz="1575" b="0" i="0" u="none" strike="noStrike" cap="none">
+      <a:defRPr sz="761" b="0" i="0" u="none" strike="noStrike" cap="none">
         <a:solidFill>
           <a:srgbClr val="000000"/>
         </a:solidFill>
@@ -1318,7 +1318,7 @@
         <a:srgbClr val="000000"/>
       </a:buClr>
       <a:buFont typeface="Arial"/>
-      <a:defRPr sz="1575" b="0" i="0" u="none" strike="noStrike" cap="none">
+      <a:defRPr sz="761" b="0" i="0" u="none" strike="noStrike" cap="none">
         <a:solidFill>
           <a:srgbClr val="000000"/>
         </a:solidFill>
@@ -1342,7 +1342,7 @@
         <a:srgbClr val="000000"/>
       </a:buClr>
       <a:buFont typeface="Arial"/>
-      <a:defRPr sz="1575" b="0" i="0" u="none" strike="noStrike" cap="none">
+      <a:defRPr sz="761" b="0" i="0" u="none" strike="noStrike" cap="none">
         <a:solidFill>
           <a:srgbClr val="000000"/>
         </a:solidFill>
@@ -1366,7 +1366,7 @@
         <a:srgbClr val="000000"/>
       </a:buClr>
       <a:buFont typeface="Arial"/>
-      <a:defRPr sz="1575" b="0" i="0" u="none" strike="noStrike" cap="none">
+      <a:defRPr sz="761" b="0" i="0" u="none" strike="noStrike" cap="none">
         <a:solidFill>
           <a:srgbClr val="000000"/>
         </a:solidFill>
@@ -1390,7 +1390,7 @@
         <a:srgbClr val="000000"/>
       </a:buClr>
       <a:buFont typeface="Arial"/>
-      <a:defRPr sz="1575" b="0" i="0" u="none" strike="noStrike" cap="none">
+      <a:defRPr sz="761" b="0" i="0" u="none" strike="noStrike" cap="none">
         <a:solidFill>
           <a:srgbClr val="000000"/>
         </a:solidFill>
@@ -1414,7 +1414,7 @@
         <a:srgbClr val="000000"/>
       </a:buClr>
       <a:buFont typeface="Arial"/>
-      <a:defRPr sz="1575" b="0" i="0" u="none" strike="noStrike" cap="none">
+      <a:defRPr sz="761" b="0" i="0" u="none" strike="noStrike" cap="none">
         <a:solidFill>
           <a:srgbClr val="000000"/>
         </a:solidFill>
@@ -1438,7 +1438,7 @@
         <a:srgbClr val="000000"/>
       </a:buClr>
       <a:buFont typeface="Arial"/>
-      <a:defRPr sz="1575" b="0" i="0" u="none" strike="noStrike" cap="none">
+      <a:defRPr sz="761" b="0" i="0" u="none" strike="noStrike" cap="none">
         <a:solidFill>
           <a:srgbClr val="000000"/>
         </a:solidFill>
@@ -1481,8 +1481,8 @@
         </p:nvSpPr>
         <p:spPr>
           <a:xfrm>
-            <a:off x="-96838" y="1143000"/>
-            <a:ext cx="7051676" cy="3086100"/>
+            <a:off x="2271713" y="1143000"/>
+            <a:ext cx="2314575" cy="3086100"/>
           </a:xfrm>
           <a:custGeom>
             <a:avLst/>
@@ -1645,8 +1645,8 @@
         </p:nvSpPr>
         <p:spPr>
           <a:xfrm>
-            <a:off x="2879924" y="1649771"/>
-            <a:ext cx="17279542" cy="3509551"/>
+            <a:off x="857250" y="1496486"/>
+            <a:ext cx="5143500" cy="3183467"/>
           </a:xfrm>
           <a:prstGeom prst="rect">
             <a:avLst/>
@@ -1785,8 +1785,8 @@
         </p:nvSpPr>
         <p:spPr>
           <a:xfrm>
-            <a:off x="2879924" y="5294663"/>
-            <a:ext cx="17279542" cy="2433816"/>
+            <a:off x="857250" y="4802718"/>
+            <a:ext cx="5143500" cy="2207682"/>
           </a:xfrm>
           <a:prstGeom prst="rect">
             <a:avLst/>
@@ -1972,8 +1972,8 @@
         </p:nvSpPr>
         <p:spPr>
           <a:xfrm>
-            <a:off x="1583959" y="9343247"/>
-            <a:ext cx="5183862" cy="536700"/>
+            <a:off x="471488" y="8475134"/>
+            <a:ext cx="1543050" cy="486833"/>
           </a:xfrm>
           <a:prstGeom prst="rect">
             <a:avLst/>
@@ -2105,8 +2105,8 @@
         </p:nvSpPr>
         <p:spPr>
           <a:xfrm>
-            <a:off x="7631799" y="9343247"/>
-            <a:ext cx="7775793" cy="536700"/>
+            <a:off x="2271713" y="8475134"/>
+            <a:ext cx="2314575" cy="486833"/>
           </a:xfrm>
           <a:prstGeom prst="rect">
             <a:avLst/>
@@ -2238,8 +2238,8 @@
         </p:nvSpPr>
         <p:spPr>
           <a:xfrm>
-            <a:off x="16271568" y="9343247"/>
-            <a:ext cx="5183862" cy="536700"/>
+            <a:off x="4843463" y="8475134"/>
+            <a:ext cx="1543050" cy="486833"/>
           </a:xfrm>
           <a:prstGeom prst="rect">
             <a:avLst/>
@@ -2365,8 +2365,8 @@
         </p:nvSpPr>
         <p:spPr>
           <a:xfrm>
-            <a:off x="1583959" y="536702"/>
-            <a:ext cx="19871473" cy="1948455"/>
+            <a:off x="471488" y="486836"/>
+            <a:ext cx="5915025" cy="1767417"/>
           </a:xfrm>
           <a:prstGeom prst="rect">
             <a:avLst/>
@@ -2504,8 +2504,8 @@
         </p:nvSpPr>
         <p:spPr>
           <a:xfrm rot="5400000">
-            <a:off x="8321663" y="-4054204"/>
-            <a:ext cx="6396064" cy="19871473"/>
+            <a:off x="528108" y="2377547"/>
+            <a:ext cx="5801784" cy="5915025"/>
           </a:xfrm>
           <a:prstGeom prst="rect">
             <a:avLst/>
@@ -2691,8 +2691,8 @@
         </p:nvSpPr>
         <p:spPr>
           <a:xfrm>
-            <a:off x="1583959" y="9343247"/>
-            <a:ext cx="5183862" cy="536700"/>
+            <a:off x="471488" y="8475134"/>
+            <a:ext cx="1543050" cy="486833"/>
           </a:xfrm>
           <a:prstGeom prst="rect">
             <a:avLst/>
@@ -2824,8 +2824,8 @@
         </p:nvSpPr>
         <p:spPr>
           <a:xfrm>
-            <a:off x="7631799" y="9343247"/>
-            <a:ext cx="7775793" cy="536700"/>
+            <a:off x="2271713" y="8475134"/>
+            <a:ext cx="2314575" cy="486833"/>
           </a:xfrm>
           <a:prstGeom prst="rect">
             <a:avLst/>
@@ -2957,8 +2957,8 @@
         </p:nvSpPr>
         <p:spPr>
           <a:xfrm>
-            <a:off x="16271568" y="9343247"/>
-            <a:ext cx="5183862" cy="536700"/>
+            <a:off x="4843463" y="8475134"/>
+            <a:ext cx="1543050" cy="486833"/>
           </a:xfrm>
           <a:prstGeom prst="rect">
             <a:avLst/>
@@ -3084,8 +3084,8 @@
         </p:nvSpPr>
         <p:spPr>
           <a:xfrm rot="5400000">
-            <a:off x="14700063" y="2324198"/>
-            <a:ext cx="8542864" cy="4967868"/>
+            <a:off x="1772575" y="3622014"/>
+            <a:ext cx="7749118" cy="1478756"/>
           </a:xfrm>
           <a:prstGeom prst="rect">
             <a:avLst/>
@@ -3223,8 +3223,8 @@
         </p:nvSpPr>
         <p:spPr>
           <a:xfrm rot="5400000">
-            <a:off x="4620332" y="-2499674"/>
-            <a:ext cx="8542864" cy="14615611"/>
+            <a:off x="-1227800" y="2186120"/>
+            <a:ext cx="7749118" cy="4350544"/>
           </a:xfrm>
           <a:prstGeom prst="rect">
             <a:avLst/>
@@ -3410,8 +3410,8 @@
         </p:nvSpPr>
         <p:spPr>
           <a:xfrm>
-            <a:off x="1583959" y="9343247"/>
-            <a:ext cx="5183862" cy="536700"/>
+            <a:off x="471488" y="8475134"/>
+            <a:ext cx="1543050" cy="486833"/>
           </a:xfrm>
           <a:prstGeom prst="rect">
             <a:avLst/>
@@ -3543,8 +3543,8 @@
         </p:nvSpPr>
         <p:spPr>
           <a:xfrm>
-            <a:off x="7631799" y="9343247"/>
-            <a:ext cx="7775793" cy="536700"/>
+            <a:off x="2271713" y="8475134"/>
+            <a:ext cx="2314575" cy="486833"/>
           </a:xfrm>
           <a:prstGeom prst="rect">
             <a:avLst/>
@@ -3676,8 +3676,8 @@
         </p:nvSpPr>
         <p:spPr>
           <a:xfrm>
-            <a:off x="16271568" y="9343247"/>
-            <a:ext cx="5183862" cy="536700"/>
+            <a:off x="4843463" y="8475134"/>
+            <a:ext cx="1543050" cy="486833"/>
           </a:xfrm>
           <a:prstGeom prst="rect">
             <a:avLst/>
@@ -3803,8 +3803,8 @@
         </p:nvSpPr>
         <p:spPr>
           <a:xfrm>
-            <a:off x="1583959" y="536702"/>
-            <a:ext cx="19871473" cy="1948455"/>
+            <a:off x="471488" y="486836"/>
+            <a:ext cx="5915025" cy="1767417"/>
           </a:xfrm>
           <a:prstGeom prst="rect">
             <a:avLst/>
@@ -3942,8 +3942,8 @@
         </p:nvSpPr>
         <p:spPr>
           <a:xfrm>
-            <a:off x="1583959" y="2683501"/>
-            <a:ext cx="19871473" cy="6396064"/>
+            <a:off x="471488" y="2434168"/>
+            <a:ext cx="5915025" cy="5801784"/>
           </a:xfrm>
           <a:prstGeom prst="rect">
             <a:avLst/>
@@ -4129,8 +4129,8 @@
         </p:nvSpPr>
         <p:spPr>
           <a:xfrm>
-            <a:off x="1583959" y="9343247"/>
-            <a:ext cx="5183862" cy="536700"/>
+            <a:off x="471488" y="8475134"/>
+            <a:ext cx="1543050" cy="486833"/>
           </a:xfrm>
           <a:prstGeom prst="rect">
             <a:avLst/>
@@ -4262,8 +4262,8 @@
         </p:nvSpPr>
         <p:spPr>
           <a:xfrm>
-            <a:off x="7631799" y="9343247"/>
-            <a:ext cx="7775793" cy="536700"/>
+            <a:off x="2271713" y="8475134"/>
+            <a:ext cx="2314575" cy="486833"/>
           </a:xfrm>
           <a:prstGeom prst="rect">
             <a:avLst/>
@@ -4395,8 +4395,8 @@
         </p:nvSpPr>
         <p:spPr>
           <a:xfrm>
-            <a:off x="16271568" y="9343247"/>
-            <a:ext cx="5183862" cy="536700"/>
+            <a:off x="4843463" y="8475134"/>
+            <a:ext cx="1543050" cy="486833"/>
           </a:xfrm>
           <a:prstGeom prst="rect">
             <a:avLst/>
@@ -4522,8 +4522,8 @@
         </p:nvSpPr>
         <p:spPr>
           <a:xfrm>
-            <a:off x="1571958" y="2513159"/>
-            <a:ext cx="19871473" cy="4193259"/>
+            <a:off x="467916" y="2279653"/>
+            <a:ext cx="5915025" cy="3803649"/>
           </a:xfrm>
           <a:prstGeom prst="rect">
             <a:avLst/>
@@ -4662,8 +4662,8 @@
         </p:nvSpPr>
         <p:spPr>
           <a:xfrm>
-            <a:off x="1571958" y="6746086"/>
-            <a:ext cx="19871473" cy="2205136"/>
+            <a:off x="467916" y="6119284"/>
+            <a:ext cx="5915025" cy="2000249"/>
           </a:xfrm>
           <a:prstGeom prst="rect">
             <a:avLst/>
@@ -4885,8 +4885,8 @@
         </p:nvSpPr>
         <p:spPr>
           <a:xfrm>
-            <a:off x="1583959" y="9343247"/>
-            <a:ext cx="5183862" cy="536700"/>
+            <a:off x="471488" y="8475134"/>
+            <a:ext cx="1543050" cy="486833"/>
           </a:xfrm>
           <a:prstGeom prst="rect">
             <a:avLst/>
@@ -5018,8 +5018,8 @@
         </p:nvSpPr>
         <p:spPr>
           <a:xfrm>
-            <a:off x="7631799" y="9343247"/>
-            <a:ext cx="7775793" cy="536700"/>
+            <a:off x="2271713" y="8475134"/>
+            <a:ext cx="2314575" cy="486833"/>
           </a:xfrm>
           <a:prstGeom prst="rect">
             <a:avLst/>
@@ -5151,8 +5151,8 @@
         </p:nvSpPr>
         <p:spPr>
           <a:xfrm>
-            <a:off x="16271568" y="9343247"/>
-            <a:ext cx="5183862" cy="536700"/>
+            <a:off x="4843463" y="8475134"/>
+            <a:ext cx="1543050" cy="486833"/>
           </a:xfrm>
           <a:prstGeom prst="rect">
             <a:avLst/>
@@ -5278,8 +5278,8 @@
         </p:nvSpPr>
         <p:spPr>
           <a:xfrm>
-            <a:off x="1583959" y="536702"/>
-            <a:ext cx="19871473" cy="1948455"/>
+            <a:off x="471488" y="486836"/>
+            <a:ext cx="5915025" cy="1767417"/>
           </a:xfrm>
           <a:prstGeom prst="rect">
             <a:avLst/>
@@ -5417,8 +5417,8 @@
         </p:nvSpPr>
         <p:spPr>
           <a:xfrm>
-            <a:off x="1583959" y="2683501"/>
-            <a:ext cx="9791740" cy="6396064"/>
+            <a:off x="471488" y="2434168"/>
+            <a:ext cx="2914650" cy="5801784"/>
           </a:xfrm>
           <a:prstGeom prst="rect">
             <a:avLst/>
@@ -5604,8 +5604,8 @@
         </p:nvSpPr>
         <p:spPr>
           <a:xfrm>
-            <a:off x="11663690" y="2683501"/>
-            <a:ext cx="9791740" cy="6396064"/>
+            <a:off x="3471862" y="2434168"/>
+            <a:ext cx="2914650" cy="5801784"/>
           </a:xfrm>
           <a:prstGeom prst="rect">
             <a:avLst/>
@@ -5791,8 +5791,8 @@
         </p:nvSpPr>
         <p:spPr>
           <a:xfrm>
-            <a:off x="1583959" y="9343247"/>
-            <a:ext cx="5183862" cy="536700"/>
+            <a:off x="471488" y="8475134"/>
+            <a:ext cx="1543050" cy="486833"/>
           </a:xfrm>
           <a:prstGeom prst="rect">
             <a:avLst/>
@@ -5924,8 +5924,8 @@
         </p:nvSpPr>
         <p:spPr>
           <a:xfrm>
-            <a:off x="7631799" y="9343247"/>
-            <a:ext cx="7775793" cy="536700"/>
+            <a:off x="2271713" y="8475134"/>
+            <a:ext cx="2314575" cy="486833"/>
           </a:xfrm>
           <a:prstGeom prst="rect">
             <a:avLst/>
@@ -6057,8 +6057,8 @@
         </p:nvSpPr>
         <p:spPr>
           <a:xfrm>
-            <a:off x="16271568" y="9343247"/>
-            <a:ext cx="5183862" cy="536700"/>
+            <a:off x="4843463" y="8475134"/>
+            <a:ext cx="1543050" cy="486833"/>
           </a:xfrm>
           <a:prstGeom prst="rect">
             <a:avLst/>
@@ -6184,8 +6184,8 @@
         </p:nvSpPr>
         <p:spPr>
           <a:xfrm>
-            <a:off x="1586959" y="536702"/>
-            <a:ext cx="19871473" cy="1948455"/>
+            <a:off x="472381" y="486836"/>
+            <a:ext cx="5915025" cy="1767417"/>
           </a:xfrm>
           <a:prstGeom prst="rect">
             <a:avLst/>
@@ -6323,8 +6323,8 @@
         </p:nvSpPr>
         <p:spPr>
           <a:xfrm>
-            <a:off x="1586960" y="2471154"/>
-            <a:ext cx="9746740" cy="1211074"/>
+            <a:off x="472381" y="2241551"/>
+            <a:ext cx="2901255" cy="1098549"/>
           </a:xfrm>
           <a:prstGeom prst="rect">
             <a:avLst/>
@@ -6510,8 +6510,8 @@
         </p:nvSpPr>
         <p:spPr>
           <a:xfrm>
-            <a:off x="1586960" y="3682228"/>
-            <a:ext cx="9746740" cy="5416004"/>
+            <a:off x="472381" y="3340100"/>
+            <a:ext cx="2901255" cy="4912785"/>
           </a:xfrm>
           <a:prstGeom prst="rect">
             <a:avLst/>
@@ -6697,8 +6697,8 @@
         </p:nvSpPr>
         <p:spPr>
           <a:xfrm>
-            <a:off x="11663691" y="2471154"/>
-            <a:ext cx="9794741" cy="1211074"/>
+            <a:off x="3471863" y="2241551"/>
+            <a:ext cx="2915543" cy="1098549"/>
           </a:xfrm>
           <a:prstGeom prst="rect">
             <a:avLst/>
@@ -6884,8 +6884,8 @@
         </p:nvSpPr>
         <p:spPr>
           <a:xfrm>
-            <a:off x="11663691" y="3682228"/>
-            <a:ext cx="9794741" cy="5416004"/>
+            <a:off x="3471863" y="3340100"/>
+            <a:ext cx="2915543" cy="4912785"/>
           </a:xfrm>
           <a:prstGeom prst="rect">
             <a:avLst/>
@@ -7071,8 +7071,8 @@
         </p:nvSpPr>
         <p:spPr>
           <a:xfrm>
-            <a:off x="1583959" y="9343247"/>
-            <a:ext cx="5183862" cy="536700"/>
+            <a:off x="471488" y="8475134"/>
+            <a:ext cx="1543050" cy="486833"/>
           </a:xfrm>
           <a:prstGeom prst="rect">
             <a:avLst/>
@@ -7204,8 +7204,8 @@
         </p:nvSpPr>
         <p:spPr>
           <a:xfrm>
-            <a:off x="7631799" y="9343247"/>
-            <a:ext cx="7775793" cy="536700"/>
+            <a:off x="2271713" y="8475134"/>
+            <a:ext cx="2314575" cy="486833"/>
           </a:xfrm>
           <a:prstGeom prst="rect">
             <a:avLst/>
@@ -7337,8 +7337,8 @@
         </p:nvSpPr>
         <p:spPr>
           <a:xfrm>
-            <a:off x="16271568" y="9343247"/>
-            <a:ext cx="5183862" cy="536700"/>
+            <a:off x="4843463" y="8475134"/>
+            <a:ext cx="1543050" cy="486833"/>
           </a:xfrm>
           <a:prstGeom prst="rect">
             <a:avLst/>
@@ -7464,8 +7464,8 @@
         </p:nvSpPr>
         <p:spPr>
           <a:xfrm>
-            <a:off x="1583959" y="536702"/>
-            <a:ext cx="19871473" cy="1948455"/>
+            <a:off x="471488" y="486836"/>
+            <a:ext cx="5915025" cy="1767417"/>
           </a:xfrm>
           <a:prstGeom prst="rect">
             <a:avLst/>
@@ -7603,8 +7603,8 @@
         </p:nvSpPr>
         <p:spPr>
           <a:xfrm>
-            <a:off x="1583959" y="9343247"/>
-            <a:ext cx="5183862" cy="536700"/>
+            <a:off x="471488" y="8475134"/>
+            <a:ext cx="1543050" cy="486833"/>
           </a:xfrm>
           <a:prstGeom prst="rect">
             <a:avLst/>
@@ -7736,8 +7736,8 @@
         </p:nvSpPr>
         <p:spPr>
           <a:xfrm>
-            <a:off x="7631799" y="9343247"/>
-            <a:ext cx="7775793" cy="536700"/>
+            <a:off x="2271713" y="8475134"/>
+            <a:ext cx="2314575" cy="486833"/>
           </a:xfrm>
           <a:prstGeom prst="rect">
             <a:avLst/>
@@ -7869,8 +7869,8 @@
         </p:nvSpPr>
         <p:spPr>
           <a:xfrm>
-            <a:off x="16271568" y="9343247"/>
-            <a:ext cx="5183862" cy="536700"/>
+            <a:off x="4843463" y="8475134"/>
+            <a:ext cx="1543050" cy="486833"/>
           </a:xfrm>
           <a:prstGeom prst="rect">
             <a:avLst/>
@@ -7996,8 +7996,8 @@
         </p:nvSpPr>
         <p:spPr>
           <a:xfrm>
-            <a:off x="1583959" y="9343247"/>
-            <a:ext cx="5183862" cy="536700"/>
+            <a:off x="471488" y="8475134"/>
+            <a:ext cx="1543050" cy="486833"/>
           </a:xfrm>
           <a:prstGeom prst="rect">
             <a:avLst/>
@@ -8129,8 +8129,8 @@
         </p:nvSpPr>
         <p:spPr>
           <a:xfrm>
-            <a:off x="7631799" y="9343247"/>
-            <a:ext cx="7775793" cy="536700"/>
+            <a:off x="2271713" y="8475134"/>
+            <a:ext cx="2314575" cy="486833"/>
           </a:xfrm>
           <a:prstGeom prst="rect">
             <a:avLst/>
@@ -8262,8 +8262,8 @@
         </p:nvSpPr>
         <p:spPr>
           <a:xfrm>
-            <a:off x="16271568" y="9343247"/>
-            <a:ext cx="5183862" cy="536700"/>
+            <a:off x="4843463" y="8475134"/>
+            <a:ext cx="1543050" cy="486833"/>
           </a:xfrm>
           <a:prstGeom prst="rect">
             <a:avLst/>
@@ -8389,8 +8389,8 @@
         </p:nvSpPr>
         <p:spPr>
           <a:xfrm>
-            <a:off x="1586960" y="672042"/>
-            <a:ext cx="7430802" cy="2352146"/>
+            <a:off x="472381" y="609600"/>
+            <a:ext cx="2211883" cy="2133600"/>
           </a:xfrm>
           <a:prstGeom prst="rect">
             <a:avLst/>
@@ -8529,8 +8529,8 @@
         </p:nvSpPr>
         <p:spPr>
           <a:xfrm>
-            <a:off x="9794741" y="1451425"/>
-            <a:ext cx="11663690" cy="7163777"/>
+            <a:off x="2915544" y="1316569"/>
+            <a:ext cx="3471862" cy="6498166"/>
           </a:xfrm>
           <a:prstGeom prst="rect">
             <a:avLst/>
@@ -8716,8 +8716,8 @@
         </p:nvSpPr>
         <p:spPr>
           <a:xfrm>
-            <a:off x="1586960" y="3024189"/>
-            <a:ext cx="7430802" cy="5602681"/>
+            <a:off x="472381" y="2743202"/>
+            <a:ext cx="2211883" cy="5082117"/>
           </a:xfrm>
           <a:prstGeom prst="rect">
             <a:avLst/>
@@ -8903,8 +8903,8 @@
         </p:nvSpPr>
         <p:spPr>
           <a:xfrm>
-            <a:off x="1583959" y="9343247"/>
-            <a:ext cx="5183862" cy="536700"/>
+            <a:off x="471488" y="8475134"/>
+            <a:ext cx="1543050" cy="486833"/>
           </a:xfrm>
           <a:prstGeom prst="rect">
             <a:avLst/>
@@ -9036,8 +9036,8 @@
         </p:nvSpPr>
         <p:spPr>
           <a:xfrm>
-            <a:off x="7631799" y="9343247"/>
-            <a:ext cx="7775793" cy="536700"/>
+            <a:off x="2271713" y="8475134"/>
+            <a:ext cx="2314575" cy="486833"/>
           </a:xfrm>
           <a:prstGeom prst="rect">
             <a:avLst/>
@@ -9169,8 +9169,8 @@
         </p:nvSpPr>
         <p:spPr>
           <a:xfrm>
-            <a:off x="16271568" y="9343247"/>
-            <a:ext cx="5183862" cy="536700"/>
+            <a:off x="4843463" y="8475134"/>
+            <a:ext cx="1543050" cy="486833"/>
           </a:xfrm>
           <a:prstGeom prst="rect">
             <a:avLst/>
@@ -9296,8 +9296,8 @@
         </p:nvSpPr>
         <p:spPr>
           <a:xfrm>
-            <a:off x="1586960" y="672042"/>
-            <a:ext cx="7430802" cy="2352146"/>
+            <a:off x="472381" y="609600"/>
+            <a:ext cx="2211883" cy="2133600"/>
           </a:xfrm>
           <a:prstGeom prst="rect">
             <a:avLst/>
@@ -9436,8 +9436,8 @@
         </p:nvSpPr>
         <p:spPr>
           <a:xfrm>
-            <a:off x="9794741" y="1451425"/>
-            <a:ext cx="11663690" cy="7163777"/>
+            <a:off x="2915544" y="1316569"/>
+            <a:ext cx="3471862" cy="6498166"/>
           </a:xfrm>
           <a:prstGeom prst="rect">
             <a:avLst/>
@@ -9460,8 +9460,8 @@
         </p:nvSpPr>
         <p:spPr>
           <a:xfrm>
-            <a:off x="1586960" y="3024189"/>
-            <a:ext cx="7430802" cy="5602681"/>
+            <a:off x="472381" y="2743202"/>
+            <a:ext cx="2211883" cy="5082117"/>
           </a:xfrm>
           <a:prstGeom prst="rect">
             <a:avLst/>
@@ -9647,8 +9647,8 @@
         </p:nvSpPr>
         <p:spPr>
           <a:xfrm>
-            <a:off x="1583959" y="9343247"/>
-            <a:ext cx="5183862" cy="536700"/>
+            <a:off x="471488" y="8475134"/>
+            <a:ext cx="1543050" cy="486833"/>
           </a:xfrm>
           <a:prstGeom prst="rect">
             <a:avLst/>
@@ -9780,8 +9780,8 @@
         </p:nvSpPr>
         <p:spPr>
           <a:xfrm>
-            <a:off x="7631799" y="9343247"/>
-            <a:ext cx="7775793" cy="536700"/>
+            <a:off x="2271713" y="8475134"/>
+            <a:ext cx="2314575" cy="486833"/>
           </a:xfrm>
           <a:prstGeom prst="rect">
             <a:avLst/>
@@ -9913,8 +9913,8 @@
         </p:nvSpPr>
         <p:spPr>
           <a:xfrm>
-            <a:off x="16271568" y="9343247"/>
-            <a:ext cx="5183862" cy="536700"/>
+            <a:off x="4843463" y="8475134"/>
+            <a:ext cx="1543050" cy="486833"/>
           </a:xfrm>
           <a:prstGeom prst="rect">
             <a:avLst/>
@@ -10048,8 +10048,8 @@
         </p:nvSpPr>
         <p:spPr>
           <a:xfrm>
-            <a:off x="1583959" y="536702"/>
-            <a:ext cx="19871473" cy="1948455"/>
+            <a:off x="471488" y="486836"/>
+            <a:ext cx="5915025" cy="1767417"/>
           </a:xfrm>
           <a:prstGeom prst="rect">
             <a:avLst/>
@@ -10196,8 +10196,8 @@
         </p:nvSpPr>
         <p:spPr>
           <a:xfrm>
-            <a:off x="1583959" y="2683501"/>
-            <a:ext cx="19871473" cy="6396064"/>
+            <a:off x="471488" y="2434168"/>
+            <a:ext cx="5915025" cy="5801784"/>
           </a:xfrm>
           <a:prstGeom prst="rect">
             <a:avLst/>
@@ -10464,8 +10464,8 @@
         </p:nvSpPr>
         <p:spPr>
           <a:xfrm>
-            <a:off x="1583959" y="9343247"/>
-            <a:ext cx="5183862" cy="536700"/>
+            <a:off x="471488" y="8475134"/>
+            <a:ext cx="1543050" cy="486833"/>
           </a:xfrm>
           <a:prstGeom prst="rect">
             <a:avLst/>
@@ -10669,8 +10669,8 @@
         </p:nvSpPr>
         <p:spPr>
           <a:xfrm>
-            <a:off x="7631799" y="9343247"/>
-            <a:ext cx="7775793" cy="536700"/>
+            <a:off x="2271713" y="8475134"/>
+            <a:ext cx="2314575" cy="486833"/>
           </a:xfrm>
           <a:prstGeom prst="rect">
             <a:avLst/>
@@ -10874,8 +10874,8 @@
         </p:nvSpPr>
         <p:spPr>
           <a:xfrm>
-            <a:off x="16271568" y="9343247"/>
-            <a:ext cx="5183862" cy="536700"/>
+            <a:off x="4843463" y="8475134"/>
+            <a:ext cx="1543050" cy="486833"/>
           </a:xfrm>
           <a:prstGeom prst="rect">
             <a:avLst/>
@@ -11764,10 +11764,10 @@
       </p:grpSpPr>
       <p:pic>
         <p:nvPicPr>
-          <p:cNvPr id="5" name="Picture 4">
+          <p:cNvPr id="2" name="Picture 1">
             <a:extLst>
               <a:ext uri="{FF2B5EF4-FFF2-40B4-BE49-F238E27FC236}">
-                <a16:creationId xmlns:a16="http://schemas.microsoft.com/office/drawing/2014/main" id="{0E0D12F0-C2B3-5AD1-59E4-4E993DF78CF9}"/>
+                <a16:creationId xmlns:a16="http://schemas.microsoft.com/office/drawing/2014/main" id="{42934218-9889-DCBD-7F02-1F43D9AD5544}"/>
               </a:ext>
             </a:extLst>
           </p:cNvPr>
@@ -11784,8 +11784,8 @@
         </p:blipFill>
         <p:spPr>
           <a:xfrm>
-            <a:off x="16012481" y="3537464"/>
-            <a:ext cx="5951769" cy="3686937"/>
+            <a:off x="4668132" y="255874"/>
+            <a:ext cx="2189868" cy="1356555"/>
           </a:xfrm>
           <a:prstGeom prst="rect">
             <a:avLst/>
@@ -11794,10 +11794,10 @@
       </p:pic>
       <p:pic>
         <p:nvPicPr>
-          <p:cNvPr id="3" name="Picture 2">
+          <p:cNvPr id="4" name="Picture 3">
             <a:extLst>
               <a:ext uri="{FF2B5EF4-FFF2-40B4-BE49-F238E27FC236}">
-                <a16:creationId xmlns:a16="http://schemas.microsoft.com/office/drawing/2014/main" id="{9A98CE56-A6B8-2F6E-30E0-A0C9B6855D1D}"/>
+                <a16:creationId xmlns:a16="http://schemas.microsoft.com/office/drawing/2014/main" id="{92CEED3A-1028-E224-DB5D-CA502E1E48A1}"/>
               </a:ext>
             </a:extLst>
           </p:cNvPr>
@@ -11814,8 +11814,8 @@
         </p:blipFill>
         <p:spPr>
           <a:xfrm>
-            <a:off x="18501494" y="163634"/>
-            <a:ext cx="4330700" cy="3124200"/>
+            <a:off x="2787705" y="138479"/>
+            <a:ext cx="1880427" cy="1356555"/>
           </a:xfrm>
           <a:prstGeom prst="rect">
             <a:avLst/>
@@ -11824,10 +11824,10 @@
       </p:pic>
       <p:pic>
         <p:nvPicPr>
-          <p:cNvPr id="121" name="Picture 120">
+          <p:cNvPr id="8" name="Picture 7">
             <a:extLst>
               <a:ext uri="{FF2B5EF4-FFF2-40B4-BE49-F238E27FC236}">
-                <a16:creationId xmlns:a16="http://schemas.microsoft.com/office/drawing/2014/main" id="{68143CD0-9D15-47C6-ECED-A79E5FD5E346}"/>
+                <a16:creationId xmlns:a16="http://schemas.microsoft.com/office/drawing/2014/main" id="{A577EA64-1F7A-D555-B131-2FC55F15C3B2}"/>
               </a:ext>
             </a:extLst>
           </p:cNvPr>
@@ -11844,20 +11844,128 @@
         </p:blipFill>
         <p:spPr>
           <a:xfrm>
-            <a:off x="13104359" y="163634"/>
-            <a:ext cx="4913517" cy="3275678"/>
+            <a:off x="1" y="0"/>
+            <a:ext cx="2676308" cy="3944767"/>
           </a:xfrm>
           <a:prstGeom prst="rect">
             <a:avLst/>
           </a:prstGeom>
         </p:spPr>
       </p:pic>
+      <p:sp>
+        <p:nvSpPr>
+          <p:cNvPr id="9" name="Google Shape;91;p1">
+            <a:extLst>
+              <a:ext uri="{FF2B5EF4-FFF2-40B4-BE49-F238E27FC236}">
+                <a16:creationId xmlns:a16="http://schemas.microsoft.com/office/drawing/2014/main" id="{8F24F3E5-6C8B-391F-3966-146E0E3F712E}"/>
+              </a:ext>
+            </a:extLst>
+          </p:cNvPr>
+          <p:cNvSpPr txBox="1"/>
+          <p:nvPr/>
+        </p:nvSpPr>
+        <p:spPr>
+          <a:xfrm>
+            <a:off x="0" y="0"/>
+            <a:ext cx="667265" cy="276959"/>
+          </a:xfrm>
+          <a:prstGeom prst="rect">
+            <a:avLst/>
+          </a:prstGeom>
+          <a:noFill/>
+          <a:ln>
+            <a:noFill/>
+          </a:ln>
+        </p:spPr>
+        <p:txBody>
+          <a:bodyPr spcFirstLastPara="1" wrap="square" lIns="91425" tIns="45700" rIns="91425" bIns="45700" anchor="t" anchorCtr="0">
+            <a:spAutoFit/>
+          </a:bodyPr>
+          <a:lstStyle/>
+          <a:p>
+            <a:pPr marL="0" marR="0" lvl="0" indent="0" algn="l" rtl="0">
+              <a:spcBef>
+                <a:spcPts val="0"/>
+              </a:spcBef>
+              <a:spcAft>
+                <a:spcPts val="0"/>
+              </a:spcAft>
+              <a:buNone/>
+            </a:pPr>
+            <a:r>
+              <a:rPr lang="en-US" sz="1200" b="1" i="0" u="none" strike="noStrike" cap="none" dirty="0">
+                <a:solidFill>
+                  <a:schemeClr val="dk1"/>
+                </a:solidFill>
+                <a:latin typeface="Arial"/>
+                <a:ea typeface="Arial"/>
+                <a:cs typeface="Arial"/>
+                <a:sym typeface="Arial"/>
+              </a:rPr>
+              <a:t>a</a:t>
+            </a:r>
+            <a:endParaRPr sz="1200" b="1" dirty="0"/>
+          </a:p>
+        </p:txBody>
+      </p:sp>
+      <p:sp>
+        <p:nvSpPr>
+          <p:cNvPr id="20" name="Google Shape;92;p1">
+            <a:extLst>
+              <a:ext uri="{FF2B5EF4-FFF2-40B4-BE49-F238E27FC236}">
+                <a16:creationId xmlns:a16="http://schemas.microsoft.com/office/drawing/2014/main" id="{799FF95C-51A6-D79B-EBA5-540C0775C4CB}"/>
+              </a:ext>
+            </a:extLst>
+          </p:cNvPr>
+          <p:cNvSpPr txBox="1"/>
+          <p:nvPr/>
+        </p:nvSpPr>
+        <p:spPr>
+          <a:xfrm>
+            <a:off x="2629480" y="1526393"/>
+            <a:ext cx="667265" cy="276959"/>
+          </a:xfrm>
+          <a:prstGeom prst="rect">
+            <a:avLst/>
+          </a:prstGeom>
+          <a:noFill/>
+          <a:ln>
+            <a:noFill/>
+          </a:ln>
+        </p:spPr>
+        <p:txBody>
+          <a:bodyPr spcFirstLastPara="1" wrap="square" lIns="91425" tIns="45700" rIns="91425" bIns="45700" anchor="t" anchorCtr="0">
+            <a:spAutoFit/>
+          </a:bodyPr>
+          <a:lstStyle/>
+          <a:p>
+            <a:pPr marL="0" marR="0" lvl="0" indent="0" algn="l" rtl="0">
+              <a:spcBef>
+                <a:spcPts val="0"/>
+              </a:spcBef>
+              <a:spcAft>
+                <a:spcPts val="0"/>
+              </a:spcAft>
+              <a:buNone/>
+            </a:pPr>
+            <a:r>
+              <a:rPr lang="en-US" sz="1200" b="1" dirty="0">
+                <a:solidFill>
+                  <a:schemeClr val="dk1"/>
+                </a:solidFill>
+              </a:rPr>
+              <a:t>d</a:t>
+            </a:r>
+            <a:endParaRPr sz="1200" b="1" dirty="0"/>
+          </a:p>
+        </p:txBody>
+      </p:sp>
       <p:pic>
         <p:nvPicPr>
-          <p:cNvPr id="118" name="Picture 117">
+          <p:cNvPr id="26" name="Picture 25">
             <a:extLst>
               <a:ext uri="{FF2B5EF4-FFF2-40B4-BE49-F238E27FC236}">
-                <a16:creationId xmlns:a16="http://schemas.microsoft.com/office/drawing/2014/main" id="{A3957A8C-35D1-E005-AF70-4D6481EBA783}"/>
+                <a16:creationId xmlns:a16="http://schemas.microsoft.com/office/drawing/2014/main" id="{A3043B48-2988-DF19-EF64-19C34C1BA15C}"/>
               </a:ext>
             </a:extLst>
           </p:cNvPr>
@@ -11874,8 +11982,38 @@
         </p:blipFill>
         <p:spPr>
           <a:xfrm>
-            <a:off x="108175" y="163634"/>
-            <a:ext cx="6380902" cy="9405183"/>
+            <a:off x="2648508" y="2954853"/>
+            <a:ext cx="4209492" cy="989914"/>
+          </a:xfrm>
+          <a:prstGeom prst="rect">
+            <a:avLst/>
+          </a:prstGeom>
+        </p:spPr>
+      </p:pic>
+      <p:pic>
+        <p:nvPicPr>
+          <p:cNvPr id="27" name="Picture 26">
+            <a:extLst>
+              <a:ext uri="{FF2B5EF4-FFF2-40B4-BE49-F238E27FC236}">
+                <a16:creationId xmlns:a16="http://schemas.microsoft.com/office/drawing/2014/main" id="{954C3D8E-9910-7BC9-D5FF-38D981718DA5}"/>
+              </a:ext>
+            </a:extLst>
+          </p:cNvPr>
+          <p:cNvPicPr>
+            <a:picLocks noChangeAspect="1"/>
+          </p:cNvPicPr>
+          <p:nvPr/>
+        </p:nvPicPr>
+        <p:blipFill>
+          <a:blip r:embed="rId7"/>
+          <a:stretch>
+            <a:fillRect/>
+          </a:stretch>
+        </p:blipFill>
+        <p:spPr>
+          <a:xfrm>
+            <a:off x="3047087" y="1638030"/>
+            <a:ext cx="2504245" cy="1125900"/>
           </a:xfrm>
           <a:prstGeom prst="rect">
             <a:avLst/>
@@ -11884,10 +12022,10 @@
       </p:pic>
       <p:sp>
         <p:nvSpPr>
-          <p:cNvPr id="86" name="Google Shape;91;p1">
+          <p:cNvPr id="28" name="Google Shape;91;p1">
             <a:extLst>
               <a:ext uri="{FF2B5EF4-FFF2-40B4-BE49-F238E27FC236}">
-                <a16:creationId xmlns:a16="http://schemas.microsoft.com/office/drawing/2014/main" id="{97599C46-1FB6-036C-C072-680130C19ABC}"/>
+                <a16:creationId xmlns:a16="http://schemas.microsoft.com/office/drawing/2014/main" id="{975DA3C4-C3AF-E721-5E4D-52AB384E7D73}"/>
               </a:ext>
             </a:extLst>
           </p:cNvPr>
@@ -11896,8 +12034,8 @@
         </p:nvSpPr>
         <p:spPr>
           <a:xfrm>
-            <a:off x="125400" y="-21032"/>
-            <a:ext cx="667265" cy="369332"/>
+            <a:off x="2616104" y="0"/>
+            <a:ext cx="667265" cy="276959"/>
           </a:xfrm>
           <a:prstGeom prst="rect">
             <a:avLst/>
@@ -11923,1303 +12061,23 @@
               <a:buNone/>
             </a:pPr>
             <a:r>
-              <a:rPr lang="en-US" sz="1800" b="0" i="0" u="none" strike="noStrike" cap="none" dirty="0">
+              <a:rPr lang="en-US" sz="1200" b="1" dirty="0">
                 <a:solidFill>
                   <a:schemeClr val="dk1"/>
                 </a:solidFill>
-                <a:latin typeface="Arial"/>
-                <a:ea typeface="Arial"/>
-                <a:cs typeface="Arial"/>
-                <a:sym typeface="Arial"/>
               </a:rPr>
-              <a:t>a</a:t>
+              <a:t>b</a:t>
             </a:r>
-            <a:endParaRPr dirty="0"/>
+            <a:endParaRPr sz="1200" b="1" dirty="0"/>
           </a:p>
         </p:txBody>
       </p:sp>
-      <p:grpSp>
-        <p:nvGrpSpPr>
-          <p:cNvPr id="87" name="Group 86">
+      <p:sp>
+        <p:nvSpPr>
+          <p:cNvPr id="29" name="Google Shape;91;p1">
             <a:extLst>
               <a:ext uri="{FF2B5EF4-FFF2-40B4-BE49-F238E27FC236}">
-                <a16:creationId xmlns:a16="http://schemas.microsoft.com/office/drawing/2014/main" id="{B05EE47A-1910-C7D9-B683-9447321FF9D1}"/>
-              </a:ext>
-            </a:extLst>
-          </p:cNvPr>
-          <p:cNvGrpSpPr/>
-          <p:nvPr/>
-        </p:nvGrpSpPr>
-        <p:grpSpPr>
-          <a:xfrm>
-            <a:off x="7862160" y="263532"/>
-            <a:ext cx="4289823" cy="1221955"/>
-            <a:chOff x="5826327" y="263532"/>
-            <a:chExt cx="4289823" cy="1221955"/>
-          </a:xfrm>
-        </p:grpSpPr>
-        <p:grpSp>
-          <p:nvGrpSpPr>
-            <p:cNvPr id="88" name="Group 87">
-              <a:extLst>
-                <a:ext uri="{FF2B5EF4-FFF2-40B4-BE49-F238E27FC236}">
-                  <a16:creationId xmlns:a16="http://schemas.microsoft.com/office/drawing/2014/main" id="{8A5E091B-7854-C688-3DB9-C135F34BB33E}"/>
-                </a:ext>
-              </a:extLst>
-            </p:cNvPr>
-            <p:cNvGrpSpPr/>
-            <p:nvPr/>
-          </p:nvGrpSpPr>
-          <p:grpSpPr>
-            <a:xfrm>
-              <a:off x="5826327" y="653990"/>
-              <a:ext cx="4105332" cy="831497"/>
-              <a:chOff x="5809074" y="653990"/>
-              <a:chExt cx="4105332" cy="831497"/>
-            </a:xfrm>
-          </p:grpSpPr>
-          <p:pic>
-            <p:nvPicPr>
-              <p:cNvPr id="100" name="Picture 99">
-                <a:extLst>
-                  <a:ext uri="{FF2B5EF4-FFF2-40B4-BE49-F238E27FC236}">
-                    <a16:creationId xmlns:a16="http://schemas.microsoft.com/office/drawing/2014/main" id="{38330F0E-D3B6-4BF2-8063-66156603C493}"/>
-                  </a:ext>
-                </a:extLst>
-              </p:cNvPr>
-              <p:cNvPicPr>
-                <a:picLocks noChangeAspect="1"/>
-              </p:cNvPicPr>
-              <p:nvPr/>
-            </p:nvPicPr>
-            <p:blipFill>
-              <a:blip r:embed="rId7"/>
-              <a:srcRect b="18064"/>
-              <a:stretch>
-                <a:fillRect/>
-              </a:stretch>
-            </p:blipFill>
-            <p:spPr>
-              <a:xfrm>
-                <a:off x="5809074" y="678754"/>
-                <a:ext cx="868511" cy="806733"/>
-              </a:xfrm>
-              <a:prstGeom prst="rect">
-                <a:avLst/>
-              </a:prstGeom>
-            </p:spPr>
-          </p:pic>
-          <p:pic>
-            <p:nvPicPr>
-              <p:cNvPr id="101" name="Picture 100">
-                <a:extLst>
-                  <a:ext uri="{FF2B5EF4-FFF2-40B4-BE49-F238E27FC236}">
-                    <a16:creationId xmlns:a16="http://schemas.microsoft.com/office/drawing/2014/main" id="{8DC4022A-6850-3761-7C0C-034B59A497BF}"/>
-                  </a:ext>
-                </a:extLst>
-              </p:cNvPr>
-              <p:cNvPicPr>
-                <a:picLocks noChangeAspect="1"/>
-              </p:cNvPicPr>
-              <p:nvPr/>
-            </p:nvPicPr>
-            <p:blipFill>
-              <a:blip r:embed="rId8"/>
-              <a:srcRect b="18064"/>
-              <a:stretch>
-                <a:fillRect/>
-              </a:stretch>
-            </p:blipFill>
-            <p:spPr>
-              <a:xfrm>
-                <a:off x="6624344" y="678754"/>
-                <a:ext cx="868511" cy="806733"/>
-              </a:xfrm>
-              <a:prstGeom prst="rect">
-                <a:avLst/>
-              </a:prstGeom>
-            </p:spPr>
-          </p:pic>
-          <p:pic>
-            <p:nvPicPr>
-              <p:cNvPr id="102" name="Picture 101">
-                <a:extLst>
-                  <a:ext uri="{FF2B5EF4-FFF2-40B4-BE49-F238E27FC236}">
-                    <a16:creationId xmlns:a16="http://schemas.microsoft.com/office/drawing/2014/main" id="{6D61991E-98B2-93CD-E63E-C55B7DE3A7C2}"/>
-                  </a:ext>
-                </a:extLst>
-              </p:cNvPr>
-              <p:cNvPicPr>
-                <a:picLocks noChangeAspect="1"/>
-              </p:cNvPicPr>
-              <p:nvPr/>
-            </p:nvPicPr>
-            <p:blipFill>
-              <a:blip r:embed="rId9"/>
-              <a:srcRect b="18064"/>
-              <a:stretch>
-                <a:fillRect/>
-              </a:stretch>
-            </p:blipFill>
-            <p:spPr>
-              <a:xfrm>
-                <a:off x="7437278" y="670926"/>
-                <a:ext cx="868511" cy="806733"/>
-              </a:xfrm>
-              <a:prstGeom prst="rect">
-                <a:avLst/>
-              </a:prstGeom>
-            </p:spPr>
-          </p:pic>
-          <p:pic>
-            <p:nvPicPr>
-              <p:cNvPr id="103" name="Picture 102">
-                <a:extLst>
-                  <a:ext uri="{FF2B5EF4-FFF2-40B4-BE49-F238E27FC236}">
-                    <a16:creationId xmlns:a16="http://schemas.microsoft.com/office/drawing/2014/main" id="{04B770A9-090B-D8A8-7CA4-B7283BCEAE9B}"/>
-                  </a:ext>
-                </a:extLst>
-              </p:cNvPr>
-              <p:cNvPicPr>
-                <a:picLocks noChangeAspect="1"/>
-              </p:cNvPicPr>
-              <p:nvPr/>
-            </p:nvPicPr>
-            <p:blipFill>
-              <a:blip r:embed="rId10"/>
-              <a:srcRect b="18064"/>
-              <a:stretch>
-                <a:fillRect/>
-              </a:stretch>
-            </p:blipFill>
-            <p:spPr>
-              <a:xfrm>
-                <a:off x="8229738" y="662458"/>
-                <a:ext cx="868511" cy="806733"/>
-              </a:xfrm>
-              <a:prstGeom prst="rect">
-                <a:avLst/>
-              </a:prstGeom>
-            </p:spPr>
-          </p:pic>
-          <p:pic>
-            <p:nvPicPr>
-              <p:cNvPr id="104" name="Picture 103">
-                <a:extLst>
-                  <a:ext uri="{FF2B5EF4-FFF2-40B4-BE49-F238E27FC236}">
-                    <a16:creationId xmlns:a16="http://schemas.microsoft.com/office/drawing/2014/main" id="{25FE308D-46D9-838A-AF3B-A73649DC609E}"/>
-                  </a:ext>
-                </a:extLst>
-              </p:cNvPr>
-              <p:cNvPicPr>
-                <a:picLocks noChangeAspect="1"/>
-              </p:cNvPicPr>
-              <p:nvPr/>
-            </p:nvPicPr>
-            <p:blipFill>
-              <a:blip r:embed="rId11"/>
-              <a:srcRect b="16568"/>
-              <a:stretch>
-                <a:fillRect/>
-              </a:stretch>
-            </p:blipFill>
-            <p:spPr>
-              <a:xfrm>
-                <a:off x="9045895" y="653990"/>
-                <a:ext cx="868511" cy="821470"/>
-              </a:xfrm>
-              <a:prstGeom prst="rect">
-                <a:avLst/>
-              </a:prstGeom>
-            </p:spPr>
-          </p:pic>
-        </p:grpSp>
-        <p:sp>
-          <p:nvSpPr>
-            <p:cNvPr id="98" name="Right Triangle 97">
-              <a:extLst>
-                <a:ext uri="{FF2B5EF4-FFF2-40B4-BE49-F238E27FC236}">
-                  <a16:creationId xmlns:a16="http://schemas.microsoft.com/office/drawing/2014/main" id="{D0A2976F-0A1E-665B-07E8-52215FC5082B}"/>
-                </a:ext>
-              </a:extLst>
-            </p:cNvPr>
-            <p:cNvSpPr/>
-            <p:nvPr/>
-          </p:nvSpPr>
-          <p:spPr>
-            <a:xfrm flipH="1">
-              <a:off x="5891225" y="263532"/>
-              <a:ext cx="3934116" cy="444911"/>
-            </a:xfrm>
-            <a:prstGeom prst="rtTriangle">
-              <a:avLst/>
-            </a:prstGeom>
-          </p:spPr>
-          <p:style>
-            <a:lnRef idx="2">
-              <a:schemeClr val="accent1">
-                <a:shade val="15000"/>
-              </a:schemeClr>
-            </a:lnRef>
-            <a:fillRef idx="1">
-              <a:schemeClr val="accent1"/>
-            </a:fillRef>
-            <a:effectRef idx="0">
-              <a:schemeClr val="accent1"/>
-            </a:effectRef>
-            <a:fontRef idx="minor">
-              <a:schemeClr val="lt1"/>
-            </a:fontRef>
-          </p:style>
-          <p:txBody>
-            <a:bodyPr rtlCol="0" anchor="ctr"/>
-            <a:lstStyle/>
-            <a:p>
-              <a:pPr algn="ctr"/>
-              <a:endParaRPr lang="en-US"/>
-            </a:p>
-          </p:txBody>
-        </p:sp>
-        <p:sp>
-          <p:nvSpPr>
-            <p:cNvPr id="99" name="TextBox 98">
-              <a:extLst>
-                <a:ext uri="{FF2B5EF4-FFF2-40B4-BE49-F238E27FC236}">
-                  <a16:creationId xmlns:a16="http://schemas.microsoft.com/office/drawing/2014/main" id="{5F6E2572-E86D-9384-50FB-9E044889FB90}"/>
-                </a:ext>
-              </a:extLst>
-            </p:cNvPr>
-            <p:cNvSpPr txBox="1"/>
-            <p:nvPr/>
-          </p:nvSpPr>
-          <p:spPr>
-            <a:xfrm>
-              <a:off x="8258144" y="389452"/>
-              <a:ext cx="1858006" cy="338554"/>
-            </a:xfrm>
-            <a:prstGeom prst="rect">
-              <a:avLst/>
-            </a:prstGeom>
-            <a:noFill/>
-          </p:spPr>
-          <p:txBody>
-            <a:bodyPr wrap="square" rtlCol="0">
-              <a:spAutoFit/>
-            </a:bodyPr>
-            <a:lstStyle/>
-            <a:p>
-              <a:r>
-                <a:rPr lang="en-US" sz="1600" dirty="0">
-                  <a:solidFill>
-                    <a:schemeClr val="bg1"/>
-                  </a:solidFill>
-                </a:rPr>
-                <a:t>Drug Sensitivity</a:t>
-              </a:r>
-            </a:p>
-          </p:txBody>
-        </p:sp>
-      </p:grpSp>
-      <p:graphicFrame>
-        <p:nvGraphicFramePr>
-          <p:cNvPr id="105" name="Table 104">
-            <a:extLst>
-              <a:ext uri="{FF2B5EF4-FFF2-40B4-BE49-F238E27FC236}">
-                <a16:creationId xmlns:a16="http://schemas.microsoft.com/office/drawing/2014/main" id="{20F0623F-B246-88A2-EA3E-5F72DCF0EB05}"/>
-              </a:ext>
-            </a:extLst>
-          </p:cNvPr>
-          <p:cNvGraphicFramePr>
-            <a:graphicFrameLocks noGrp="1"/>
-          </p:cNvGraphicFramePr>
-          <p:nvPr>
-            <p:extLst>
-              <p:ext uri="{D42A27DB-BD31-4B8C-83A1-F6EECF244321}">
-                <p14:modId xmlns:p14="http://schemas.microsoft.com/office/powerpoint/2010/main" val="2169817048"/>
-              </p:ext>
-            </p:extLst>
-          </p:nvPr>
-        </p:nvGraphicFramePr>
-        <p:xfrm>
-          <a:off x="6779886" y="1479564"/>
-          <a:ext cx="5836697" cy="1524000"/>
-        </p:xfrm>
-        <a:graphic>
-          <a:graphicData uri="http://schemas.openxmlformats.org/drawingml/2006/table">
-            <a:tbl>
-              <a:tblPr firstRow="1" bandRow="1">
-                <a:tableStyleId>{2D5ABB26-0587-4C30-8999-92F81FD0307C}</a:tableStyleId>
-              </a:tblPr>
-              <a:tblGrid>
-                <a:gridCol w="1073108">
-                  <a:extLst>
-                    <a:ext uri="{9D8B030D-6E8A-4147-A177-3AD203B41FA5}">
-                      <a16:colId xmlns:a16="http://schemas.microsoft.com/office/drawing/2014/main" val="2567247298"/>
-                    </a:ext>
-                  </a:extLst>
-                </a:gridCol>
-                <a:gridCol w="790552">
-                  <a:extLst>
-                    <a:ext uri="{9D8B030D-6E8A-4147-A177-3AD203B41FA5}">
-                      <a16:colId xmlns:a16="http://schemas.microsoft.com/office/drawing/2014/main" val="2177772220"/>
-                    </a:ext>
-                  </a:extLst>
-                </a:gridCol>
-                <a:gridCol w="846660">
-                  <a:extLst>
-                    <a:ext uri="{9D8B030D-6E8A-4147-A177-3AD203B41FA5}">
-                      <a16:colId xmlns:a16="http://schemas.microsoft.com/office/drawing/2014/main" val="2753472440"/>
-                    </a:ext>
-                  </a:extLst>
-                </a:gridCol>
-                <a:gridCol w="792480">
-                  <a:extLst>
-                    <a:ext uri="{9D8B030D-6E8A-4147-A177-3AD203B41FA5}">
-                      <a16:colId xmlns:a16="http://schemas.microsoft.com/office/drawing/2014/main" val="1099147240"/>
-                    </a:ext>
-                  </a:extLst>
-                </a:gridCol>
-                <a:gridCol w="801188">
-                  <a:extLst>
-                    <a:ext uri="{9D8B030D-6E8A-4147-A177-3AD203B41FA5}">
-                      <a16:colId xmlns:a16="http://schemas.microsoft.com/office/drawing/2014/main" val="389095009"/>
-                    </a:ext>
-                  </a:extLst>
-                </a:gridCol>
-                <a:gridCol w="844732">
-                  <a:extLst>
-                    <a:ext uri="{9D8B030D-6E8A-4147-A177-3AD203B41FA5}">
-                      <a16:colId xmlns:a16="http://schemas.microsoft.com/office/drawing/2014/main" val="1109415032"/>
-                    </a:ext>
-                  </a:extLst>
-                </a:gridCol>
-                <a:gridCol w="687977">
-                  <a:extLst>
-                    <a:ext uri="{9D8B030D-6E8A-4147-A177-3AD203B41FA5}">
-                      <a16:colId xmlns:a16="http://schemas.microsoft.com/office/drawing/2014/main" val="2717760737"/>
-                    </a:ext>
-                  </a:extLst>
-                </a:gridCol>
-              </a:tblGrid>
-              <a:tr h="276053">
-                <a:tc>
-                  <a:txBody>
-                    <a:bodyPr/>
-                    <a:lstStyle/>
-                    <a:p>
-                      <a:endParaRPr lang="en-US" dirty="0"/>
-                    </a:p>
-                  </a:txBody>
-                  <a:tcPr>
-                    <a:lnT w="12700" cap="flat" cmpd="sng" algn="ctr">
-                      <a:noFill/>
-                      <a:prstDash val="solid"/>
-                      <a:round/>
-                      <a:headEnd type="none" w="med" len="med"/>
-                      <a:tailEnd type="none" w="med" len="med"/>
-                    </a:lnT>
-                    <a:lnB w="12700" cap="flat" cmpd="sng" algn="ctr">
-                      <a:solidFill>
-                        <a:schemeClr val="tx1"/>
-                      </a:solidFill>
-                      <a:prstDash val="solid"/>
-                      <a:round/>
-                      <a:headEnd type="none" w="med" len="med"/>
-                      <a:tailEnd type="none" w="med" len="med"/>
-                    </a:lnB>
-                  </a:tcPr>
-                </a:tc>
-                <a:tc>
-                  <a:txBody>
-                    <a:bodyPr/>
-                    <a:lstStyle/>
-                    <a:p>
-                      <a:pPr algn="ctr"/>
-                      <a:r>
-                        <a:rPr lang="en-US" dirty="0"/>
-                        <a:t>Cat_1</a:t>
-                      </a:r>
-                    </a:p>
-                  </a:txBody>
-                  <a:tcPr>
-                    <a:lnT w="12700" cap="flat" cmpd="sng" algn="ctr">
-                      <a:noFill/>
-                      <a:prstDash val="solid"/>
-                      <a:round/>
-                      <a:headEnd type="none" w="med" len="med"/>
-                      <a:tailEnd type="none" w="med" len="med"/>
-                    </a:lnT>
-                    <a:lnB w="12700" cap="flat" cmpd="sng" algn="ctr">
-                      <a:solidFill>
-                        <a:schemeClr val="tx1"/>
-                      </a:solidFill>
-                      <a:prstDash val="solid"/>
-                      <a:round/>
-                      <a:headEnd type="none" w="med" len="med"/>
-                      <a:tailEnd type="none" w="med" len="med"/>
-                    </a:lnB>
-                  </a:tcPr>
-                </a:tc>
-                <a:tc>
-                  <a:txBody>
-                    <a:bodyPr/>
-                    <a:lstStyle/>
-                    <a:p>
-                      <a:pPr algn="ctr"/>
-                      <a:r>
-                        <a:rPr lang="en-US" dirty="0"/>
-                        <a:t>Cat_2</a:t>
-                      </a:r>
-                    </a:p>
-                  </a:txBody>
-                  <a:tcPr>
-                    <a:lnT w="12700" cap="flat" cmpd="sng" algn="ctr">
-                      <a:noFill/>
-                      <a:prstDash val="solid"/>
-                      <a:round/>
-                      <a:headEnd type="none" w="med" len="med"/>
-                      <a:tailEnd type="none" w="med" len="med"/>
-                    </a:lnT>
-                    <a:lnB w="12700" cap="flat" cmpd="sng" algn="ctr">
-                      <a:solidFill>
-                        <a:schemeClr val="tx1"/>
-                      </a:solidFill>
-                      <a:prstDash val="solid"/>
-                      <a:round/>
-                      <a:headEnd type="none" w="med" len="med"/>
-                      <a:tailEnd type="none" w="med" len="med"/>
-                    </a:lnB>
-                  </a:tcPr>
-                </a:tc>
-                <a:tc>
-                  <a:txBody>
-                    <a:bodyPr/>
-                    <a:lstStyle/>
-                    <a:p>
-                      <a:pPr algn="ctr"/>
-                      <a:r>
-                        <a:rPr lang="en-US" dirty="0"/>
-                        <a:t>Cat_3</a:t>
-                      </a:r>
-                    </a:p>
-                  </a:txBody>
-                  <a:tcPr>
-                    <a:lnT w="12700" cap="flat" cmpd="sng" algn="ctr">
-                      <a:noFill/>
-                      <a:prstDash val="solid"/>
-                      <a:round/>
-                      <a:headEnd type="none" w="med" len="med"/>
-                      <a:tailEnd type="none" w="med" len="med"/>
-                    </a:lnT>
-                    <a:lnB w="12700" cap="flat" cmpd="sng" algn="ctr">
-                      <a:solidFill>
-                        <a:schemeClr val="tx1"/>
-                      </a:solidFill>
-                      <a:prstDash val="solid"/>
-                      <a:round/>
-                      <a:headEnd type="none" w="med" len="med"/>
-                      <a:tailEnd type="none" w="med" len="med"/>
-                    </a:lnB>
-                  </a:tcPr>
-                </a:tc>
-                <a:tc>
-                  <a:txBody>
-                    <a:bodyPr/>
-                    <a:lstStyle/>
-                    <a:p>
-                      <a:pPr algn="ctr"/>
-                      <a:r>
-                        <a:rPr lang="en-US" dirty="0"/>
-                        <a:t>Cat_4</a:t>
-                      </a:r>
-                    </a:p>
-                  </a:txBody>
-                  <a:tcPr>
-                    <a:lnT w="12700" cap="flat" cmpd="sng" algn="ctr">
-                      <a:noFill/>
-                      <a:prstDash val="solid"/>
-                      <a:round/>
-                      <a:headEnd type="none" w="med" len="med"/>
-                      <a:tailEnd type="none" w="med" len="med"/>
-                    </a:lnT>
-                    <a:lnB w="12700" cap="flat" cmpd="sng" algn="ctr">
-                      <a:solidFill>
-                        <a:schemeClr val="tx1"/>
-                      </a:solidFill>
-                      <a:prstDash val="solid"/>
-                      <a:round/>
-                      <a:headEnd type="none" w="med" len="med"/>
-                      <a:tailEnd type="none" w="med" len="med"/>
-                    </a:lnB>
-                  </a:tcPr>
-                </a:tc>
-                <a:tc>
-                  <a:txBody>
-                    <a:bodyPr/>
-                    <a:lstStyle/>
-                    <a:p>
-                      <a:pPr algn="ctr"/>
-                      <a:r>
-                        <a:rPr lang="en-US" dirty="0"/>
-                        <a:t>Cat_5</a:t>
-                      </a:r>
-                    </a:p>
-                  </a:txBody>
-                  <a:tcPr>
-                    <a:lnT w="12700" cap="flat" cmpd="sng" algn="ctr">
-                      <a:noFill/>
-                      <a:prstDash val="solid"/>
-                      <a:round/>
-                      <a:headEnd type="none" w="med" len="med"/>
-                      <a:tailEnd type="none" w="med" len="med"/>
-                    </a:lnT>
-                    <a:lnB w="12700" cap="flat" cmpd="sng" algn="ctr">
-                      <a:solidFill>
-                        <a:schemeClr val="tx1"/>
-                      </a:solidFill>
-                      <a:prstDash val="solid"/>
-                      <a:round/>
-                      <a:headEnd type="none" w="med" len="med"/>
-                      <a:tailEnd type="none" w="med" len="med"/>
-                    </a:lnB>
-                  </a:tcPr>
-                </a:tc>
-                <a:tc>
-                  <a:txBody>
-                    <a:bodyPr/>
-                    <a:lstStyle/>
-                    <a:p>
-                      <a:pPr algn="ctr"/>
-                      <a:r>
-                        <a:rPr lang="en-US" dirty="0"/>
-                        <a:t>Total</a:t>
-                      </a:r>
-                    </a:p>
-                  </a:txBody>
-                  <a:tcPr>
-                    <a:lnT w="12700" cap="flat" cmpd="sng" algn="ctr">
-                      <a:noFill/>
-                      <a:prstDash val="solid"/>
-                      <a:round/>
-                      <a:headEnd type="none" w="med" len="med"/>
-                      <a:tailEnd type="none" w="med" len="med"/>
-                    </a:lnT>
-                    <a:lnB w="12700" cap="flat" cmpd="sng" algn="ctr">
-                      <a:solidFill>
-                        <a:schemeClr val="tx1"/>
-                      </a:solidFill>
-                      <a:prstDash val="solid"/>
-                      <a:round/>
-                      <a:headEnd type="none" w="med" len="med"/>
-                      <a:tailEnd type="none" w="med" len="med"/>
-                    </a:lnB>
-                  </a:tcPr>
-                </a:tc>
-                <a:extLst>
-                  <a:ext uri="{0D108BD9-81ED-4DB2-BD59-A6C34878D82A}">
-                    <a16:rowId xmlns:a16="http://schemas.microsoft.com/office/drawing/2014/main" val="1645153670"/>
-                  </a:ext>
-                </a:extLst>
-              </a:tr>
-              <a:tr h="276053">
-                <a:tc>
-                  <a:txBody>
-                    <a:bodyPr/>
-                    <a:lstStyle/>
-                    <a:p>
-                      <a:r>
-                        <a:rPr lang="en-US" dirty="0"/>
-                        <a:t>Expert 1</a:t>
-                      </a:r>
-                    </a:p>
-                  </a:txBody>
-                  <a:tcPr>
-                    <a:lnT w="12700" cap="flat" cmpd="sng" algn="ctr">
-                      <a:solidFill>
-                        <a:schemeClr val="tx1"/>
-                      </a:solidFill>
-                      <a:prstDash val="solid"/>
-                      <a:round/>
-                      <a:headEnd type="none" w="med" len="med"/>
-                      <a:tailEnd type="none" w="med" len="med"/>
-                    </a:lnT>
-                  </a:tcPr>
-                </a:tc>
-                <a:tc>
-                  <a:txBody>
-                    <a:bodyPr/>
-                    <a:lstStyle/>
-                    <a:p>
-                      <a:pPr algn="ctr"/>
-                      <a:r>
-                        <a:rPr lang="en-US" dirty="0"/>
-                        <a:t>233</a:t>
-                      </a:r>
-                    </a:p>
-                  </a:txBody>
-                  <a:tcPr>
-                    <a:lnT w="12700" cap="flat" cmpd="sng" algn="ctr">
-                      <a:solidFill>
-                        <a:schemeClr val="tx1"/>
-                      </a:solidFill>
-                      <a:prstDash val="solid"/>
-                      <a:round/>
-                      <a:headEnd type="none" w="med" len="med"/>
-                      <a:tailEnd type="none" w="med" len="med"/>
-                    </a:lnT>
-                  </a:tcPr>
-                </a:tc>
-                <a:tc>
-                  <a:txBody>
-                    <a:bodyPr/>
-                    <a:lstStyle/>
-                    <a:p>
-                      <a:pPr algn="ctr"/>
-                      <a:r>
-                        <a:rPr lang="en-US" dirty="0"/>
-                        <a:t>435</a:t>
-                      </a:r>
-                    </a:p>
-                  </a:txBody>
-                  <a:tcPr>
-                    <a:lnT w="12700" cap="flat" cmpd="sng" algn="ctr">
-                      <a:solidFill>
-                        <a:schemeClr val="tx1"/>
-                      </a:solidFill>
-                      <a:prstDash val="solid"/>
-                      <a:round/>
-                      <a:headEnd type="none" w="med" len="med"/>
-                      <a:tailEnd type="none" w="med" len="med"/>
-                    </a:lnT>
-                  </a:tcPr>
-                </a:tc>
-                <a:tc>
-                  <a:txBody>
-                    <a:bodyPr/>
-                    <a:lstStyle/>
-                    <a:p>
-                      <a:pPr algn="ctr"/>
-                      <a:r>
-                        <a:rPr lang="en-US" dirty="0"/>
-                        <a:t>282</a:t>
-                      </a:r>
-                    </a:p>
-                  </a:txBody>
-                  <a:tcPr>
-                    <a:lnT w="12700" cap="flat" cmpd="sng" algn="ctr">
-                      <a:solidFill>
-                        <a:schemeClr val="tx1"/>
-                      </a:solidFill>
-                      <a:prstDash val="solid"/>
-                      <a:round/>
-                      <a:headEnd type="none" w="med" len="med"/>
-                      <a:tailEnd type="none" w="med" len="med"/>
-                    </a:lnT>
-                  </a:tcPr>
-                </a:tc>
-                <a:tc>
-                  <a:txBody>
-                    <a:bodyPr/>
-                    <a:lstStyle/>
-                    <a:p>
-                      <a:pPr algn="ctr"/>
-                      <a:r>
-                        <a:rPr lang="en-US" dirty="0"/>
-                        <a:t>250</a:t>
-                      </a:r>
-                    </a:p>
-                  </a:txBody>
-                  <a:tcPr>
-                    <a:lnT w="12700" cap="flat" cmpd="sng" algn="ctr">
-                      <a:solidFill>
-                        <a:schemeClr val="tx1"/>
-                      </a:solidFill>
-                      <a:prstDash val="solid"/>
-                      <a:round/>
-                      <a:headEnd type="none" w="med" len="med"/>
-                      <a:tailEnd type="none" w="med" len="med"/>
-                    </a:lnT>
-                  </a:tcPr>
-                </a:tc>
-                <a:tc>
-                  <a:txBody>
-                    <a:bodyPr/>
-                    <a:lstStyle/>
-                    <a:p>
-                      <a:pPr algn="ctr"/>
-                      <a:r>
-                        <a:rPr lang="en-US" dirty="0"/>
-                        <a:t>100</a:t>
-                      </a:r>
-                    </a:p>
-                  </a:txBody>
-                  <a:tcPr>
-                    <a:lnT w="12700" cap="flat" cmpd="sng" algn="ctr">
-                      <a:solidFill>
-                        <a:schemeClr val="tx1"/>
-                      </a:solidFill>
-                      <a:prstDash val="solid"/>
-                      <a:round/>
-                      <a:headEnd type="none" w="med" len="med"/>
-                      <a:tailEnd type="none" w="med" len="med"/>
-                    </a:lnT>
-                  </a:tcPr>
-                </a:tc>
-                <a:tc>
-                  <a:txBody>
-                    <a:bodyPr/>
-                    <a:lstStyle/>
-                    <a:p>
-                      <a:pPr algn="ctr"/>
-                      <a:r>
-                        <a:rPr lang="en-US" dirty="0"/>
-                        <a:t>1300</a:t>
-                      </a:r>
-                    </a:p>
-                  </a:txBody>
-                  <a:tcPr>
-                    <a:lnT w="12700" cap="flat" cmpd="sng" algn="ctr">
-                      <a:solidFill>
-                        <a:schemeClr val="tx1"/>
-                      </a:solidFill>
-                      <a:prstDash val="solid"/>
-                      <a:round/>
-                      <a:headEnd type="none" w="med" len="med"/>
-                      <a:tailEnd type="none" w="med" len="med"/>
-                    </a:lnT>
-                  </a:tcPr>
-                </a:tc>
-                <a:extLst>
-                  <a:ext uri="{0D108BD9-81ED-4DB2-BD59-A6C34878D82A}">
-                    <a16:rowId xmlns:a16="http://schemas.microsoft.com/office/drawing/2014/main" val="2531294971"/>
-                  </a:ext>
-                </a:extLst>
-              </a:tr>
-              <a:tr h="276053">
-                <a:tc>
-                  <a:txBody>
-                    <a:bodyPr/>
-                    <a:lstStyle/>
-                    <a:p>
-                      <a:r>
-                        <a:rPr lang="en-US" dirty="0"/>
-                        <a:t>Expert 2</a:t>
-                      </a:r>
-                    </a:p>
-                  </a:txBody>
-                  <a:tcPr/>
-                </a:tc>
-                <a:tc>
-                  <a:txBody>
-                    <a:bodyPr/>
-                    <a:lstStyle/>
-                    <a:p>
-                      <a:pPr algn="ctr"/>
-                      <a:r>
-                        <a:rPr lang="en-US" dirty="0"/>
-                        <a:t>255</a:t>
-                      </a:r>
-                    </a:p>
-                  </a:txBody>
-                  <a:tcPr/>
-                </a:tc>
-                <a:tc>
-                  <a:txBody>
-                    <a:bodyPr/>
-                    <a:lstStyle/>
-                    <a:p>
-                      <a:pPr algn="ctr"/>
-                      <a:r>
-                        <a:rPr lang="en-US" dirty="0"/>
-                        <a:t>423</a:t>
-                      </a:r>
-                    </a:p>
-                  </a:txBody>
-                  <a:tcPr/>
-                </a:tc>
-                <a:tc>
-                  <a:txBody>
-                    <a:bodyPr/>
-                    <a:lstStyle/>
-                    <a:p>
-                      <a:pPr algn="ctr"/>
-                      <a:r>
-                        <a:rPr lang="en-US" dirty="0"/>
-                        <a:t>362</a:t>
-                      </a:r>
-                    </a:p>
-                  </a:txBody>
-                  <a:tcPr/>
-                </a:tc>
-                <a:tc>
-                  <a:txBody>
-                    <a:bodyPr/>
-                    <a:lstStyle/>
-                    <a:p>
-                      <a:pPr algn="ctr"/>
-                      <a:r>
-                        <a:rPr lang="en-US" dirty="0"/>
-                        <a:t>233</a:t>
-                      </a:r>
-                    </a:p>
-                  </a:txBody>
-                  <a:tcPr/>
-                </a:tc>
-                <a:tc>
-                  <a:txBody>
-                    <a:bodyPr/>
-                    <a:lstStyle/>
-                    <a:p>
-                      <a:pPr algn="ctr"/>
-                      <a:r>
-                        <a:rPr lang="en-US" dirty="0"/>
-                        <a:t>24</a:t>
-                      </a:r>
-                    </a:p>
-                  </a:txBody>
-                  <a:tcPr/>
-                </a:tc>
-                <a:tc>
-                  <a:txBody>
-                    <a:bodyPr/>
-                    <a:lstStyle/>
-                    <a:p>
-                      <a:pPr algn="ctr"/>
-                      <a:r>
-                        <a:rPr lang="en-US" dirty="0"/>
-                        <a:t>1300</a:t>
-                      </a:r>
-                    </a:p>
-                  </a:txBody>
-                  <a:tcPr/>
-                </a:tc>
-                <a:extLst>
-                  <a:ext uri="{0D108BD9-81ED-4DB2-BD59-A6C34878D82A}">
-                    <a16:rowId xmlns:a16="http://schemas.microsoft.com/office/drawing/2014/main" val="4273555364"/>
-                  </a:ext>
-                </a:extLst>
-              </a:tr>
-              <a:tr h="276053">
-                <a:tc>
-                  <a:txBody>
-                    <a:bodyPr/>
-                    <a:lstStyle/>
-                    <a:p>
-                      <a:r>
-                        <a:rPr lang="en-US" dirty="0"/>
-                        <a:t>Expert 3</a:t>
-                      </a:r>
-                    </a:p>
-                  </a:txBody>
-                  <a:tcPr>
-                    <a:lnB w="12700" cap="flat" cmpd="sng" algn="ctr">
-                      <a:solidFill>
-                        <a:schemeClr val="tx1"/>
-                      </a:solidFill>
-                      <a:prstDash val="solid"/>
-                      <a:round/>
-                      <a:headEnd type="none" w="med" len="med"/>
-                      <a:tailEnd type="none" w="med" len="med"/>
-                    </a:lnB>
-                  </a:tcPr>
-                </a:tc>
-                <a:tc>
-                  <a:txBody>
-                    <a:bodyPr/>
-                    <a:lstStyle/>
-                    <a:p>
-                      <a:pPr algn="ctr"/>
-                      <a:r>
-                        <a:rPr lang="en-US" dirty="0"/>
-                        <a:t>387</a:t>
-                      </a:r>
-                    </a:p>
-                  </a:txBody>
-                  <a:tcPr>
-                    <a:lnB w="12700" cap="flat" cmpd="sng" algn="ctr">
-                      <a:solidFill>
-                        <a:schemeClr val="tx1"/>
-                      </a:solidFill>
-                      <a:prstDash val="solid"/>
-                      <a:round/>
-                      <a:headEnd type="none" w="med" len="med"/>
-                      <a:tailEnd type="none" w="med" len="med"/>
-                    </a:lnB>
-                  </a:tcPr>
-                </a:tc>
-                <a:tc>
-                  <a:txBody>
-                    <a:bodyPr/>
-                    <a:lstStyle/>
-                    <a:p>
-                      <a:pPr algn="ctr"/>
-                      <a:r>
-                        <a:rPr lang="en-US" dirty="0"/>
-                        <a:t>289</a:t>
-                      </a:r>
-                    </a:p>
-                  </a:txBody>
-                  <a:tcPr>
-                    <a:lnB w="12700" cap="flat" cmpd="sng" algn="ctr">
-                      <a:solidFill>
-                        <a:schemeClr val="tx1"/>
-                      </a:solidFill>
-                      <a:prstDash val="solid"/>
-                      <a:round/>
-                      <a:headEnd type="none" w="med" len="med"/>
-                      <a:tailEnd type="none" w="med" len="med"/>
-                    </a:lnB>
-                  </a:tcPr>
-                </a:tc>
-                <a:tc>
-                  <a:txBody>
-                    <a:bodyPr/>
-                    <a:lstStyle/>
-                    <a:p>
-                      <a:pPr algn="ctr"/>
-                      <a:r>
-                        <a:rPr lang="en-US" dirty="0"/>
-                        <a:t>300</a:t>
-                      </a:r>
-                    </a:p>
-                  </a:txBody>
-                  <a:tcPr>
-                    <a:lnB w="12700" cap="flat" cmpd="sng" algn="ctr">
-                      <a:solidFill>
-                        <a:schemeClr val="tx1"/>
-                      </a:solidFill>
-                      <a:prstDash val="solid"/>
-                      <a:round/>
-                      <a:headEnd type="none" w="med" len="med"/>
-                      <a:tailEnd type="none" w="med" len="med"/>
-                    </a:lnB>
-                  </a:tcPr>
-                </a:tc>
-                <a:tc>
-                  <a:txBody>
-                    <a:bodyPr/>
-                    <a:lstStyle/>
-                    <a:p>
-                      <a:pPr algn="ctr"/>
-                      <a:r>
-                        <a:rPr lang="en-US" dirty="0"/>
-                        <a:t>174</a:t>
-                      </a:r>
-                    </a:p>
-                  </a:txBody>
-                  <a:tcPr>
-                    <a:lnB w="12700" cap="flat" cmpd="sng" algn="ctr">
-                      <a:solidFill>
-                        <a:schemeClr val="tx1"/>
-                      </a:solidFill>
-                      <a:prstDash val="solid"/>
-                      <a:round/>
-                      <a:headEnd type="none" w="med" len="med"/>
-                      <a:tailEnd type="none" w="med" len="med"/>
-                    </a:lnB>
-                  </a:tcPr>
-                </a:tc>
-                <a:tc>
-                  <a:txBody>
-                    <a:bodyPr/>
-                    <a:lstStyle/>
-                    <a:p>
-                      <a:pPr algn="ctr"/>
-                      <a:r>
-                        <a:rPr lang="en-US" dirty="0"/>
-                        <a:t>139</a:t>
-                      </a:r>
-                    </a:p>
-                  </a:txBody>
-                  <a:tcPr>
-                    <a:lnB w="12700" cap="flat" cmpd="sng" algn="ctr">
-                      <a:solidFill>
-                        <a:schemeClr val="tx1"/>
-                      </a:solidFill>
-                      <a:prstDash val="solid"/>
-                      <a:round/>
-                      <a:headEnd type="none" w="med" len="med"/>
-                      <a:tailEnd type="none" w="med" len="med"/>
-                    </a:lnB>
-                  </a:tcPr>
-                </a:tc>
-                <a:tc>
-                  <a:txBody>
-                    <a:bodyPr/>
-                    <a:lstStyle/>
-                    <a:p>
-                      <a:pPr algn="ctr"/>
-                      <a:r>
-                        <a:rPr lang="en-US" dirty="0"/>
-                        <a:t>1300</a:t>
-                      </a:r>
-                    </a:p>
-                  </a:txBody>
-                  <a:tcPr>
-                    <a:lnB w="12700" cap="flat" cmpd="sng" algn="ctr">
-                      <a:solidFill>
-                        <a:schemeClr val="tx1"/>
-                      </a:solidFill>
-                      <a:prstDash val="solid"/>
-                      <a:round/>
-                      <a:headEnd type="none" w="med" len="med"/>
-                      <a:tailEnd type="none" w="med" len="med"/>
-                    </a:lnB>
-                  </a:tcPr>
-                </a:tc>
-                <a:extLst>
-                  <a:ext uri="{0D108BD9-81ED-4DB2-BD59-A6C34878D82A}">
-                    <a16:rowId xmlns:a16="http://schemas.microsoft.com/office/drawing/2014/main" val="3123146192"/>
-                  </a:ext>
-                </a:extLst>
-              </a:tr>
-              <a:tr h="276053">
-                <a:tc>
-                  <a:txBody>
-                    <a:bodyPr/>
-                    <a:lstStyle/>
-                    <a:p>
-                      <a:r>
-                        <a:rPr lang="en-US" dirty="0"/>
-                        <a:t>Consensus</a:t>
-                      </a:r>
-                    </a:p>
-                  </a:txBody>
-                  <a:tcPr>
-                    <a:lnT w="12700" cap="flat" cmpd="sng" algn="ctr">
-                      <a:solidFill>
-                        <a:schemeClr val="tx1"/>
-                      </a:solidFill>
-                      <a:prstDash val="solid"/>
-                      <a:round/>
-                      <a:headEnd type="none" w="med" len="med"/>
-                      <a:tailEnd type="none" w="med" len="med"/>
-                    </a:lnT>
-                    <a:lnB w="12700" cap="flat" cmpd="sng" algn="ctr">
-                      <a:solidFill>
-                        <a:schemeClr val="tx1"/>
-                      </a:solidFill>
-                      <a:prstDash val="solid"/>
-                      <a:round/>
-                      <a:headEnd type="none" w="med" len="med"/>
-                      <a:tailEnd type="none" w="med" len="med"/>
-                    </a:lnB>
-                  </a:tcPr>
-                </a:tc>
-                <a:tc>
-                  <a:txBody>
-                    <a:bodyPr/>
-                    <a:lstStyle/>
-                    <a:p>
-                      <a:pPr algn="ctr"/>
-                      <a:r>
-                        <a:rPr lang="en-US" dirty="0"/>
-                        <a:t>305</a:t>
-                      </a:r>
-                    </a:p>
-                  </a:txBody>
-                  <a:tcPr>
-                    <a:lnT w="12700" cap="flat" cmpd="sng" algn="ctr">
-                      <a:solidFill>
-                        <a:schemeClr val="tx1"/>
-                      </a:solidFill>
-                      <a:prstDash val="solid"/>
-                      <a:round/>
-                      <a:headEnd type="none" w="med" len="med"/>
-                      <a:tailEnd type="none" w="med" len="med"/>
-                    </a:lnT>
-                    <a:lnB w="12700" cap="flat" cmpd="sng" algn="ctr">
-                      <a:solidFill>
-                        <a:schemeClr val="tx1"/>
-                      </a:solidFill>
-                      <a:prstDash val="solid"/>
-                      <a:round/>
-                      <a:headEnd type="none" w="med" len="med"/>
-                      <a:tailEnd type="none" w="med" len="med"/>
-                    </a:lnB>
-                  </a:tcPr>
-                </a:tc>
-                <a:tc>
-                  <a:txBody>
-                    <a:bodyPr/>
-                    <a:lstStyle/>
-                    <a:p>
-                      <a:pPr algn="ctr"/>
-                      <a:r>
-                        <a:rPr lang="en-US" dirty="0"/>
-                        <a:t>359</a:t>
-                      </a:r>
-                    </a:p>
-                  </a:txBody>
-                  <a:tcPr>
-                    <a:lnT w="12700" cap="flat" cmpd="sng" algn="ctr">
-                      <a:solidFill>
-                        <a:schemeClr val="tx1"/>
-                      </a:solidFill>
-                      <a:prstDash val="solid"/>
-                      <a:round/>
-                      <a:headEnd type="none" w="med" len="med"/>
-                      <a:tailEnd type="none" w="med" len="med"/>
-                    </a:lnT>
-                    <a:lnB w="12700" cap="flat" cmpd="sng" algn="ctr">
-                      <a:solidFill>
-                        <a:schemeClr val="tx1"/>
-                      </a:solidFill>
-                      <a:prstDash val="solid"/>
-                      <a:round/>
-                      <a:headEnd type="none" w="med" len="med"/>
-                      <a:tailEnd type="none" w="med" len="med"/>
-                    </a:lnB>
-                  </a:tcPr>
-                </a:tc>
-                <a:tc>
-                  <a:txBody>
-                    <a:bodyPr/>
-                    <a:lstStyle/>
-                    <a:p>
-                      <a:pPr algn="ctr"/>
-                      <a:r>
-                        <a:rPr lang="en-US" dirty="0"/>
-                        <a:t>299</a:t>
-                      </a:r>
-                    </a:p>
-                  </a:txBody>
-                  <a:tcPr>
-                    <a:lnT w="12700" cap="flat" cmpd="sng" algn="ctr">
-                      <a:solidFill>
-                        <a:schemeClr val="tx1"/>
-                      </a:solidFill>
-                      <a:prstDash val="solid"/>
-                      <a:round/>
-                      <a:headEnd type="none" w="med" len="med"/>
-                      <a:tailEnd type="none" w="med" len="med"/>
-                    </a:lnT>
-                    <a:lnB w="12700" cap="flat" cmpd="sng" algn="ctr">
-                      <a:solidFill>
-                        <a:schemeClr val="tx1"/>
-                      </a:solidFill>
-                      <a:prstDash val="solid"/>
-                      <a:round/>
-                      <a:headEnd type="none" w="med" len="med"/>
-                      <a:tailEnd type="none" w="med" len="med"/>
-                    </a:lnB>
-                  </a:tcPr>
-                </a:tc>
-                <a:tc>
-                  <a:txBody>
-                    <a:bodyPr/>
-                    <a:lstStyle/>
-                    <a:p>
-                      <a:pPr algn="ctr"/>
-                      <a:r>
-                        <a:rPr lang="en-US" dirty="0"/>
-                        <a:t>213</a:t>
-                      </a:r>
-                    </a:p>
-                  </a:txBody>
-                  <a:tcPr>
-                    <a:lnT w="12700" cap="flat" cmpd="sng" algn="ctr">
-                      <a:solidFill>
-                        <a:schemeClr val="tx1"/>
-                      </a:solidFill>
-                      <a:prstDash val="solid"/>
-                      <a:round/>
-                      <a:headEnd type="none" w="med" len="med"/>
-                      <a:tailEnd type="none" w="med" len="med"/>
-                    </a:lnT>
-                    <a:lnB w="12700" cap="flat" cmpd="sng" algn="ctr">
-                      <a:solidFill>
-                        <a:schemeClr val="tx1"/>
-                      </a:solidFill>
-                      <a:prstDash val="solid"/>
-                      <a:round/>
-                      <a:headEnd type="none" w="med" len="med"/>
-                      <a:tailEnd type="none" w="med" len="med"/>
-                    </a:lnB>
-                  </a:tcPr>
-                </a:tc>
-                <a:tc>
-                  <a:txBody>
-                    <a:bodyPr/>
-                    <a:lstStyle/>
-                    <a:p>
-                      <a:pPr algn="ctr"/>
-                      <a:r>
-                        <a:rPr lang="en-US" dirty="0"/>
-                        <a:t>91</a:t>
-                      </a:r>
-                    </a:p>
-                  </a:txBody>
-                  <a:tcPr>
-                    <a:lnT w="12700" cap="flat" cmpd="sng" algn="ctr">
-                      <a:solidFill>
-                        <a:schemeClr val="tx1"/>
-                      </a:solidFill>
-                      <a:prstDash val="solid"/>
-                      <a:round/>
-                      <a:headEnd type="none" w="med" len="med"/>
-                      <a:tailEnd type="none" w="med" len="med"/>
-                    </a:lnT>
-                    <a:lnB w="12700" cap="flat" cmpd="sng" algn="ctr">
-                      <a:solidFill>
-                        <a:schemeClr val="tx1"/>
-                      </a:solidFill>
-                      <a:prstDash val="solid"/>
-                      <a:round/>
-                      <a:headEnd type="none" w="med" len="med"/>
-                      <a:tailEnd type="none" w="med" len="med"/>
-                    </a:lnB>
-                  </a:tcPr>
-                </a:tc>
-                <a:tc>
-                  <a:txBody>
-                    <a:bodyPr/>
-                    <a:lstStyle/>
-                    <a:p>
-                      <a:pPr algn="ctr"/>
-                      <a:r>
-                        <a:rPr lang="en-US" dirty="0"/>
-                        <a:t>1267</a:t>
-                      </a:r>
-                    </a:p>
-                  </a:txBody>
-                  <a:tcPr>
-                    <a:lnT w="12700" cap="flat" cmpd="sng" algn="ctr">
-                      <a:solidFill>
-                        <a:schemeClr val="tx1"/>
-                      </a:solidFill>
-                      <a:prstDash val="solid"/>
-                      <a:round/>
-                      <a:headEnd type="none" w="med" len="med"/>
-                      <a:tailEnd type="none" w="med" len="med"/>
-                    </a:lnT>
-                    <a:lnB w="12700" cap="flat" cmpd="sng" algn="ctr">
-                      <a:solidFill>
-                        <a:schemeClr val="tx1"/>
-                      </a:solidFill>
-                      <a:prstDash val="solid"/>
-                      <a:round/>
-                      <a:headEnd type="none" w="med" len="med"/>
-                      <a:tailEnd type="none" w="med" len="med"/>
-                    </a:lnB>
-                  </a:tcPr>
-                </a:tc>
-                <a:extLst>
-                  <a:ext uri="{0D108BD9-81ED-4DB2-BD59-A6C34878D82A}">
-                    <a16:rowId xmlns:a16="http://schemas.microsoft.com/office/drawing/2014/main" val="842168098"/>
-                  </a:ext>
-                </a:extLst>
-              </a:tr>
-            </a:tbl>
-          </a:graphicData>
-        </a:graphic>
-      </p:graphicFrame>
-      <p:sp>
-        <p:nvSpPr>
-          <p:cNvPr id="106" name="Google Shape;92;p1">
-            <a:extLst>
-              <a:ext uri="{FF2B5EF4-FFF2-40B4-BE49-F238E27FC236}">
-                <a16:creationId xmlns:a16="http://schemas.microsoft.com/office/drawing/2014/main" id="{55E6CC98-3B7C-629F-EF4E-B16D1B7AED55}"/>
+                <a16:creationId xmlns:a16="http://schemas.microsoft.com/office/drawing/2014/main" id="{99E9DE9C-AABA-F507-9FDB-A9BFB99083C7}"/>
               </a:ext>
             </a:extLst>
           </p:cNvPr>
@@ -13228,8 +12086,8 @@
         </p:nvSpPr>
         <p:spPr>
           <a:xfrm>
-            <a:off x="6468947" y="103021"/>
-            <a:ext cx="667265" cy="369332"/>
+            <a:off x="4700168" y="0"/>
+            <a:ext cx="667265" cy="276959"/>
           </a:xfrm>
           <a:prstGeom prst="rect">
             <a:avLst/>
@@ -13255,27 +12113,23 @@
               <a:buNone/>
             </a:pPr>
             <a:r>
-              <a:rPr lang="en-US" sz="1800" dirty="0">
+              <a:rPr lang="en-US" sz="1200" b="1" dirty="0">
                 <a:solidFill>
                   <a:schemeClr val="dk1"/>
                 </a:solidFill>
-                <a:latin typeface="Arial"/>
-                <a:ea typeface="Arial"/>
-                <a:cs typeface="Arial"/>
-                <a:sym typeface="Arial"/>
               </a:rPr>
-              <a:t>b</a:t>
+              <a:t>c</a:t>
             </a:r>
-            <a:endParaRPr dirty="0"/>
+            <a:endParaRPr sz="1200" b="1" dirty="0"/>
           </a:p>
         </p:txBody>
       </p:sp>
       <p:sp>
         <p:nvSpPr>
-          <p:cNvPr id="107" name="Google Shape;93;p1">
+          <p:cNvPr id="30" name="Google Shape;92;p1">
             <a:extLst>
               <a:ext uri="{FF2B5EF4-FFF2-40B4-BE49-F238E27FC236}">
-                <a16:creationId xmlns:a16="http://schemas.microsoft.com/office/drawing/2014/main" id="{1F39DEF8-E4CA-36F7-B823-2BDEDACF8325}"/>
+                <a16:creationId xmlns:a16="http://schemas.microsoft.com/office/drawing/2014/main" id="{CE212310-2235-ABF3-61A0-6581BF756A72}"/>
               </a:ext>
             </a:extLst>
           </p:cNvPr>
@@ -13283,9 +12137,9 @@
           <p:nvPr/>
         </p:nvSpPr>
         <p:spPr>
-          <a:xfrm flipH="1">
-            <a:off x="13028164" y="97451"/>
-            <a:ext cx="1080624" cy="369291"/>
+          <a:xfrm>
+            <a:off x="2573494" y="2735580"/>
+            <a:ext cx="667265" cy="276959"/>
           </a:xfrm>
           <a:prstGeom prst="rect">
             <a:avLst/>
@@ -13311,27 +12165,23 @@
               <a:buNone/>
             </a:pPr>
             <a:r>
-              <a:rPr lang="en-US" sz="1800" dirty="0">
+              <a:rPr lang="en-US" sz="1200" b="1" dirty="0">
                 <a:solidFill>
                   <a:schemeClr val="dk1"/>
                 </a:solidFill>
-                <a:latin typeface="Arial"/>
-                <a:ea typeface="Arial"/>
-                <a:cs typeface="Arial"/>
-                <a:sym typeface="Arial"/>
               </a:rPr>
-              <a:t>c</a:t>
+              <a:t>e</a:t>
             </a:r>
-            <a:endParaRPr dirty="0"/>
+            <a:endParaRPr sz="1200" b="1" dirty="0"/>
           </a:p>
         </p:txBody>
       </p:sp>
       <p:sp>
         <p:nvSpPr>
-          <p:cNvPr id="108" name="Google Shape;95;p1">
+          <p:cNvPr id="31" name="TextBox 30">
             <a:extLst>
               <a:ext uri="{FF2B5EF4-FFF2-40B4-BE49-F238E27FC236}">
-                <a16:creationId xmlns:a16="http://schemas.microsoft.com/office/drawing/2014/main" id="{FEC0BC8C-C0A1-DA31-7FC1-44B540225803}"/>
+                <a16:creationId xmlns:a16="http://schemas.microsoft.com/office/drawing/2014/main" id="{768CF49E-28B9-B1D2-29BF-E490E7005DAD}"/>
               </a:ext>
             </a:extLst>
           </p:cNvPr>
@@ -13340,264 +12190,37 @@
         </p:nvSpPr>
         <p:spPr>
           <a:xfrm>
-            <a:off x="18482478" y="97451"/>
-            <a:ext cx="667265" cy="369332"/>
+            <a:off x="1" y="4368471"/>
+            <a:ext cx="6857999" cy="1708160"/>
           </a:xfrm>
           <a:prstGeom prst="rect">
             <a:avLst/>
           </a:prstGeom>
           <a:noFill/>
-          <a:ln>
-            <a:noFill/>
-          </a:ln>
         </p:spPr>
         <p:txBody>
-          <a:bodyPr spcFirstLastPara="1" wrap="square" lIns="91425" tIns="45700" rIns="91425" bIns="45700" anchor="t" anchorCtr="0">
+          <a:bodyPr wrap="square" rtlCol="0">
             <a:spAutoFit/>
           </a:bodyPr>
           <a:lstStyle/>
           <a:p>
-            <a:pPr marL="0" marR="0" lvl="0" indent="0" algn="l" rtl="0">
-              <a:spcBef>
-                <a:spcPts val="0"/>
-              </a:spcBef>
-              <a:spcAft>
-                <a:spcPts val="0"/>
-              </a:spcAft>
-              <a:buNone/>
-            </a:pPr>
             <a:r>
-              <a:rPr lang="en-US" sz="1800" dirty="0">
-                <a:solidFill>
-                  <a:schemeClr val="dk1"/>
-                </a:solidFill>
-                <a:latin typeface="Arial"/>
-                <a:ea typeface="Arial"/>
-                <a:cs typeface="Arial"/>
-                <a:sym typeface="Arial"/>
-              </a:rPr>
-              <a:t>d</a:t>
+              <a:rPr lang="en-CA" sz="1050" b="1" dirty="0"/>
+              <a:t>Figure 3</a:t>
             </a:r>
-            <a:endParaRPr dirty="0"/>
+            <a:r>
+              <a:rPr lang="en-CA" sz="1050" dirty="0"/>
+              <a:t>. Image-based deep learning captures non-linear drug-response dynamics.</a:t>
+            </a:r>
+          </a:p>
+          <a:p>
+            <a:r>
+              <a:rPr lang="en-CA" sz="1050" dirty="0"/>
+              <a:t>(a) Case study two workflow: tumour-volume growth curves for model-drug batches from the PDXE pan-cancer cohort are rendered as standardized images, scored by a three-rater expert panel into five ordinal response categories, and used to train and compare an image-based ResNet18 classifier against a feature-based Random Forest classifier under matched 5-fold cross-validation. (b) Cross-validated performance (macro-averaged precision, recall, F1-score, and balanced accuracy) of ResNet18 versus Random Forest across 5 outer folds. (c) Random Forest feature importance (mean absolute SHAP value, stacked by response category) for the top 10 of thirteen engineered response features, ranked by total mean absolute SHAP across categories. (d) Pooled out-of-fold confusion matrices for ResNet18 and Random Forest across all 1,267 curves. (e) Representative Grad-CAM visualizations for one correctly classified, held-out example per response category.</a:t>
+            </a:r>
           </a:p>
         </p:txBody>
       </p:sp>
-      <p:sp>
-        <p:nvSpPr>
-          <p:cNvPr id="110" name="Google Shape;95;p1">
-            <a:extLst>
-              <a:ext uri="{FF2B5EF4-FFF2-40B4-BE49-F238E27FC236}">
-                <a16:creationId xmlns:a16="http://schemas.microsoft.com/office/drawing/2014/main" id="{31C98E1C-CDFE-D09D-A175-4797027519D6}"/>
-              </a:ext>
-            </a:extLst>
-          </p:cNvPr>
-          <p:cNvSpPr txBox="1"/>
-          <p:nvPr/>
-        </p:nvSpPr>
-        <p:spPr>
-          <a:xfrm>
-            <a:off x="6836184" y="3460375"/>
-            <a:ext cx="667265" cy="369291"/>
-          </a:xfrm>
-          <a:prstGeom prst="rect">
-            <a:avLst/>
-          </a:prstGeom>
-          <a:noFill/>
-          <a:ln>
-            <a:noFill/>
-          </a:ln>
-        </p:spPr>
-        <p:txBody>
-          <a:bodyPr spcFirstLastPara="1" wrap="square" lIns="91425" tIns="45700" rIns="91425" bIns="45700" anchor="t" anchorCtr="0">
-            <a:spAutoFit/>
-          </a:bodyPr>
-          <a:lstStyle/>
-          <a:p>
-            <a:pPr marL="0" marR="0" lvl="0" indent="0" algn="l" rtl="0">
-              <a:spcBef>
-                <a:spcPts val="0"/>
-              </a:spcBef>
-              <a:spcAft>
-                <a:spcPts val="0"/>
-              </a:spcAft>
-              <a:buNone/>
-            </a:pPr>
-            <a:r>
-              <a:rPr lang="en-US" sz="1800" dirty="0">
-                <a:solidFill>
-                  <a:schemeClr val="dk1"/>
-                </a:solidFill>
-              </a:rPr>
-              <a:t>e</a:t>
-            </a:r>
-            <a:endParaRPr dirty="0"/>
-          </a:p>
-        </p:txBody>
-      </p:sp>
-      <p:sp>
-        <p:nvSpPr>
-          <p:cNvPr id="111" name="Google Shape;95;p1">
-            <a:extLst>
-              <a:ext uri="{FF2B5EF4-FFF2-40B4-BE49-F238E27FC236}">
-                <a16:creationId xmlns:a16="http://schemas.microsoft.com/office/drawing/2014/main" id="{E48CE2D4-ED5B-783B-B282-0A26DD36AF07}"/>
-              </a:ext>
-            </a:extLst>
-          </p:cNvPr>
-          <p:cNvSpPr txBox="1"/>
-          <p:nvPr/>
-        </p:nvSpPr>
-        <p:spPr>
-          <a:xfrm>
-            <a:off x="16012481" y="3460334"/>
-            <a:ext cx="667265" cy="369291"/>
-          </a:xfrm>
-          <a:prstGeom prst="rect">
-            <a:avLst/>
-          </a:prstGeom>
-          <a:noFill/>
-          <a:ln>
-            <a:noFill/>
-          </a:ln>
-        </p:spPr>
-        <p:txBody>
-          <a:bodyPr spcFirstLastPara="1" wrap="square" lIns="91425" tIns="45700" rIns="91425" bIns="45700" anchor="t" anchorCtr="0">
-            <a:spAutoFit/>
-          </a:bodyPr>
-          <a:lstStyle/>
-          <a:p>
-            <a:pPr marL="0" marR="0" lvl="0" indent="0" algn="l" rtl="0">
-              <a:spcBef>
-                <a:spcPts val="0"/>
-              </a:spcBef>
-              <a:spcAft>
-                <a:spcPts val="0"/>
-              </a:spcAft>
-              <a:buNone/>
-            </a:pPr>
-            <a:r>
-              <a:rPr lang="en-US" sz="1800" dirty="0">
-                <a:solidFill>
-                  <a:schemeClr val="dk1"/>
-                </a:solidFill>
-              </a:rPr>
-              <a:t>f</a:t>
-            </a:r>
-            <a:endParaRPr dirty="0"/>
-          </a:p>
-        </p:txBody>
-      </p:sp>
-      <p:sp>
-        <p:nvSpPr>
-          <p:cNvPr id="116" name="Google Shape;95;p1">
-            <a:extLst>
-              <a:ext uri="{FF2B5EF4-FFF2-40B4-BE49-F238E27FC236}">
-                <a16:creationId xmlns:a16="http://schemas.microsoft.com/office/drawing/2014/main" id="{3305D225-37EE-7774-110B-A5AF25DAE9E1}"/>
-              </a:ext>
-            </a:extLst>
-          </p:cNvPr>
-          <p:cNvSpPr txBox="1"/>
-          <p:nvPr/>
-        </p:nvSpPr>
-        <p:spPr>
-          <a:xfrm>
-            <a:off x="6836183" y="7124676"/>
-            <a:ext cx="667265" cy="369291"/>
-          </a:xfrm>
-          <a:prstGeom prst="rect">
-            <a:avLst/>
-          </a:prstGeom>
-          <a:noFill/>
-          <a:ln>
-            <a:noFill/>
-          </a:ln>
-        </p:spPr>
-        <p:txBody>
-          <a:bodyPr spcFirstLastPara="1" wrap="square" lIns="91425" tIns="45700" rIns="91425" bIns="45700" anchor="t" anchorCtr="0">
-            <a:spAutoFit/>
-          </a:bodyPr>
-          <a:lstStyle/>
-          <a:p>
-            <a:pPr marL="0" marR="0" lvl="0" indent="0" algn="l" rtl="0">
-              <a:spcBef>
-                <a:spcPts val="0"/>
-              </a:spcBef>
-              <a:spcAft>
-                <a:spcPts val="0"/>
-              </a:spcAft>
-              <a:buNone/>
-            </a:pPr>
-            <a:r>
-              <a:rPr lang="en-US" sz="1800" dirty="0">
-                <a:solidFill>
-                  <a:schemeClr val="dk1"/>
-                </a:solidFill>
-              </a:rPr>
-              <a:t>g</a:t>
-            </a:r>
-            <a:endParaRPr dirty="0"/>
-          </a:p>
-        </p:txBody>
-      </p:sp>
-      <p:pic>
-        <p:nvPicPr>
-          <p:cNvPr id="123" name="Picture 122">
-            <a:extLst>
-              <a:ext uri="{FF2B5EF4-FFF2-40B4-BE49-F238E27FC236}">
-                <a16:creationId xmlns:a16="http://schemas.microsoft.com/office/drawing/2014/main" id="{061302A0-3CB8-37B0-BDDB-C1C8A8A82CE3}"/>
-              </a:ext>
-            </a:extLst>
-          </p:cNvPr>
-          <p:cNvPicPr>
-            <a:picLocks noChangeAspect="1"/>
-          </p:cNvPicPr>
-          <p:nvPr/>
-        </p:nvPicPr>
-        <p:blipFill>
-          <a:blip r:embed="rId12"/>
-          <a:stretch>
-            <a:fillRect/>
-          </a:stretch>
-        </p:blipFill>
-        <p:spPr>
-          <a:xfrm>
-            <a:off x="7293777" y="7298689"/>
-            <a:ext cx="11134018" cy="2618302"/>
-          </a:xfrm>
-          <a:prstGeom prst="rect">
-            <a:avLst/>
-          </a:prstGeom>
-        </p:spPr>
-      </p:pic>
-      <p:pic>
-        <p:nvPicPr>
-          <p:cNvPr id="7" name="Picture 6">
-            <a:extLst>
-              <a:ext uri="{FF2B5EF4-FFF2-40B4-BE49-F238E27FC236}">
-                <a16:creationId xmlns:a16="http://schemas.microsoft.com/office/drawing/2014/main" id="{614F4FE2-CCCA-8282-18AF-A50038DE9A5B}"/>
-              </a:ext>
-            </a:extLst>
-          </p:cNvPr>
-          <p:cNvPicPr>
-            <a:picLocks noChangeAspect="1"/>
-          </p:cNvPicPr>
-          <p:nvPr/>
-        </p:nvPicPr>
-        <p:blipFill>
-          <a:blip r:embed="rId13"/>
-          <a:stretch>
-            <a:fillRect/>
-          </a:stretch>
-        </p:blipFill>
-        <p:spPr>
-          <a:xfrm>
-            <a:off x="7269275" y="3537464"/>
-            <a:ext cx="7728834" cy="3474859"/>
-          </a:xfrm>
-          <a:prstGeom prst="rect">
-            <a:avLst/>
-          </a:prstGeom>
-        </p:spPr>
-      </p:pic>
     </p:spTree>
   </p:cSld>
   <p:clrMapOvr>
